--- a/media/module8/slides.pptx
+++ b/media/module8/slides.pptx
@@ -21,6 +21,20 @@
     <p:sldId id="269" r:id="rId21"/>
     <p:sldId id="270" r:id="rId22"/>
     <p:sldId id="271" r:id="rId23"/>
+    <p:sldId id="272" r:id="rId24"/>
+    <p:sldId id="273" r:id="rId25"/>
+    <p:sldId id="274" r:id="rId26"/>
+    <p:sldId id="275" r:id="rId27"/>
+    <p:sldId id="276" r:id="rId28"/>
+    <p:sldId id="277" r:id="rId29"/>
+    <p:sldId id="278" r:id="rId30"/>
+    <p:sldId id="279" r:id="rId31"/>
+    <p:sldId id="280" r:id="rId32"/>
+    <p:sldId id="281" r:id="rId33"/>
+    <p:sldId id="282" r:id="rId34"/>
+    <p:sldId id="283" r:id="rId35"/>
+    <p:sldId id="284" r:id="rId36"/>
+    <p:sldId id="285" r:id="rId37"/>
   </p:sldIdLst>
   <p:sldSz cx="12191695" cy="6858000" type="screen4x3"/>
   <p:notesSz cx="6858000" cy="9144000"/>
@@ -517,7 +531,287 @@
           <a:lstStyle/>
           <a:p>
             <a:r>
-              <a:t>From MODULE8 Topics Covered.</a:t>
+              <a:t>From docs/MODULE8.md — read guides before running demos.</a:t>
+            </a:r>
+          </a:p>
+        </p:txBody>
+      </p:sp>
+      <p:sp>
+        <p:nvSpPr>
+          <p:cNvPr id="4" name="Slide Number Placeholder 3"/>
+          <p:cNvSpPr>
+            <a:spLocks noGrp="1"/>
+          </p:cNvSpPr>
+          <p:nvPr>
+            <p:ph type="sldNum" idx="5" sz="quarter"/>
+          </p:nvPr>
+        </p:nvSpPr>
+        <p:spPr/>
+      </p:sp>
+    </p:spTree>
+  </p:cSld>
+  <p:clrMapOvr>
+    <a:masterClrMapping/>
+  </p:clrMapOvr>
+</p:notes>
+</file>
+
+<file path=ppt/notesSlides/notesSlide10.xml><?xml version="1.0" encoding="utf-8"?>
+<p:notes xmlns:a="http://schemas.openxmlformats.org/drawingml/2006/main" xmlns:p="http://schemas.openxmlformats.org/presentationml/2006/main" xmlns:r="http://schemas.openxmlformats.org/officeDocument/2006/relationships">
+  <p:cSld>
+    <p:spTree>
+      <p:nvGrpSpPr>
+        <p:cNvPr id="1" name=""/>
+        <p:cNvGrpSpPr/>
+        <p:nvPr/>
+      </p:nvGrpSpPr>
+      <p:grpSpPr>
+        <a:xfrm>
+          <a:off x="0" y="0"/>
+          <a:ext cx="0" cy="0"/>
+          <a:chOff x="0" y="0"/>
+          <a:chExt cx="0" cy="0"/>
+        </a:xfrm>
+      </p:grpSpPr>
+      <p:sp>
+        <p:nvSpPr>
+          <p:cNvPr id="2" name="Slide Image Placeholder 1"/>
+          <p:cNvSpPr>
+            <a:spLocks noGrp="1"/>
+          </p:cNvSpPr>
+          <p:nvPr>
+            <p:ph type="sldImg" idx="2"/>
+          </p:nvPr>
+        </p:nvSpPr>
+        <p:spPr/>
+      </p:sp>
+      <p:sp>
+        <p:nvSpPr>
+          <p:cNvPr id="3" name="Notes Placeholder 2"/>
+          <p:cNvSpPr>
+            <a:spLocks noGrp="1"/>
+          </p:cNvSpPr>
+          <p:nvPr>
+            <p:ph type="body" idx="3" sz="quarter"/>
+          </p:nvPr>
+        </p:nvSpPr>
+        <p:spPr/>
+        <p:txBody>
+          <a:bodyPr/>
+          <a:lstStyle/>
+          <a:p>
+            <a:r>
+              <a:t>Run from course repository root.</a:t>
+            </a:r>
+          </a:p>
+        </p:txBody>
+      </p:sp>
+      <p:sp>
+        <p:nvSpPr>
+          <p:cNvPr id="4" name="Slide Number Placeholder 3"/>
+          <p:cNvSpPr>
+            <a:spLocks noGrp="1"/>
+          </p:cNvSpPr>
+          <p:nvPr>
+            <p:ph type="sldNum" idx="5" sz="quarter"/>
+          </p:nvPr>
+        </p:nvSpPr>
+        <p:spPr/>
+      </p:sp>
+    </p:spTree>
+  </p:cSld>
+  <p:clrMapOvr>
+    <a:masterClrMapping/>
+  </p:clrMapOvr>
+</p:notes>
+</file>
+
+<file path=ppt/notesSlides/notesSlide11.xml><?xml version="1.0" encoding="utf-8"?>
+<p:notes xmlns:a="http://schemas.openxmlformats.org/drawingml/2006/main" xmlns:p="http://schemas.openxmlformats.org/presentationml/2006/main" xmlns:r="http://schemas.openxmlformats.org/officeDocument/2006/relationships">
+  <p:cSld>
+    <p:spTree>
+      <p:nvGrpSpPr>
+        <p:cNvPr id="1" name=""/>
+        <p:cNvGrpSpPr/>
+        <p:nvPr/>
+      </p:nvGrpSpPr>
+      <p:grpSpPr>
+        <a:xfrm>
+          <a:off x="0" y="0"/>
+          <a:ext cx="0" cy="0"/>
+          <a:chOff x="0" y="0"/>
+          <a:chExt cx="0" cy="0"/>
+        </a:xfrm>
+      </p:grpSpPr>
+      <p:sp>
+        <p:nvSpPr>
+          <p:cNvPr id="2" name="Slide Image Placeholder 1"/>
+          <p:cNvSpPr>
+            <a:spLocks noGrp="1"/>
+          </p:cNvSpPr>
+          <p:nvPr>
+            <p:ph type="sldImg" idx="2"/>
+          </p:nvPr>
+        </p:nvSpPr>
+        <p:spPr/>
+      </p:sp>
+      <p:sp>
+        <p:nvSpPr>
+          <p:cNvPr id="3" name="Notes Placeholder 2"/>
+          <p:cNvSpPr>
+            <a:spLocks noGrp="1"/>
+          </p:cNvSpPr>
+          <p:nvPr>
+            <p:ph type="body" idx="3" sz="quarter"/>
+          </p:nvPr>
+        </p:nvSpPr>
+        <p:spPr/>
+        <p:txBody>
+          <a:bodyPr/>
+          <a:lstStyle/>
+          <a:p>
+            <a:r>
+              <a:t>module8/examples/examples/i2c_uvm/README.md</a:t>
+            </a:r>
+          </a:p>
+        </p:txBody>
+      </p:sp>
+      <p:sp>
+        <p:nvSpPr>
+          <p:cNvPr id="4" name="Slide Number Placeholder 3"/>
+          <p:cNvSpPr>
+            <a:spLocks noGrp="1"/>
+          </p:cNvSpPr>
+          <p:nvPr>
+            <p:ph type="sldNum" idx="5" sz="quarter"/>
+          </p:nvPr>
+        </p:nvSpPr>
+        <p:spPr/>
+      </p:sp>
+    </p:spTree>
+  </p:cSld>
+  <p:clrMapOvr>
+    <a:masterClrMapping/>
+  </p:clrMapOvr>
+</p:notes>
+</file>
+
+<file path=ppt/notesSlides/notesSlide12.xml><?xml version="1.0" encoding="utf-8"?>
+<p:notes xmlns:a="http://schemas.openxmlformats.org/drawingml/2006/main" xmlns:p="http://schemas.openxmlformats.org/presentationml/2006/main" xmlns:r="http://schemas.openxmlformats.org/officeDocument/2006/relationships">
+  <p:cSld>
+    <p:spTree>
+      <p:nvGrpSpPr>
+        <p:cNvPr id="1" name=""/>
+        <p:cNvGrpSpPr/>
+        <p:nvPr/>
+      </p:nvGrpSpPr>
+      <p:grpSpPr>
+        <a:xfrm>
+          <a:off x="0" y="0"/>
+          <a:ext cx="0" cy="0"/>
+          <a:chOff x="0" y="0"/>
+          <a:chExt cx="0" cy="0"/>
+        </a:xfrm>
+      </p:grpSpPr>
+      <p:sp>
+        <p:nvSpPr>
+          <p:cNvPr id="2" name="Slide Image Placeholder 1"/>
+          <p:cNvSpPr>
+            <a:spLocks noGrp="1"/>
+          </p:cNvSpPr>
+          <p:nvPr>
+            <p:ph type="sldImg" idx="2"/>
+          </p:nvPr>
+        </p:nvSpPr>
+        <p:spPr/>
+      </p:sp>
+      <p:sp>
+        <p:nvSpPr>
+          <p:cNvPr id="3" name="Notes Placeholder 2"/>
+          <p:cNvSpPr>
+            <a:spLocks noGrp="1"/>
+          </p:cNvSpPr>
+          <p:nvPr>
+            <p:ph type="body" idx="3" sz="quarter"/>
+          </p:nvPr>
+        </p:nvSpPr>
+        <p:spPr/>
+        <p:txBody>
+          <a:bodyPr/>
+          <a:lstStyle/>
+          <a:p>
+            <a:r>
+              <a:t>Hands-on: module8/examples/examples/i2c_uvm/</a:t>
+            </a:r>
+          </a:p>
+        </p:txBody>
+      </p:sp>
+      <p:sp>
+        <p:nvSpPr>
+          <p:cNvPr id="4" name="Slide Number Placeholder 3"/>
+          <p:cNvSpPr>
+            <a:spLocks noGrp="1"/>
+          </p:cNvSpPr>
+          <p:nvPr>
+            <p:ph type="sldNum" idx="5" sz="quarter"/>
+          </p:nvPr>
+        </p:nvSpPr>
+        <p:spPr/>
+      </p:sp>
+    </p:spTree>
+  </p:cSld>
+  <p:clrMapOvr>
+    <a:masterClrMapping/>
+  </p:clrMapOvr>
+</p:notes>
+</file>
+
+<file path=ppt/notesSlides/notesSlide13.xml><?xml version="1.0" encoding="utf-8"?>
+<p:notes xmlns:a="http://schemas.openxmlformats.org/drawingml/2006/main" xmlns:p="http://schemas.openxmlformats.org/presentationml/2006/main" xmlns:r="http://schemas.openxmlformats.org/officeDocument/2006/relationships">
+  <p:cSld>
+    <p:spTree>
+      <p:nvGrpSpPr>
+        <p:cNvPr id="1" name=""/>
+        <p:cNvGrpSpPr/>
+        <p:nvPr/>
+      </p:nvGrpSpPr>
+      <p:grpSpPr>
+        <a:xfrm>
+          <a:off x="0" y="0"/>
+          <a:ext cx="0" cy="0"/>
+          <a:chOff x="0" y="0"/>
+          <a:chExt cx="0" cy="0"/>
+        </a:xfrm>
+      </p:grpSpPr>
+      <p:sp>
+        <p:nvSpPr>
+          <p:cNvPr id="2" name="Slide Image Placeholder 1"/>
+          <p:cNvSpPr>
+            <a:spLocks noGrp="1"/>
+          </p:cNvSpPr>
+          <p:nvPr>
+            <p:ph type="sldImg" idx="2"/>
+          </p:nvPr>
+        </p:nvSpPr>
+        <p:spPr/>
+      </p:sp>
+      <p:sp>
+        <p:nvSpPr>
+          <p:cNvPr id="3" name="Notes Placeholder 2"/>
+          <p:cNvSpPr>
+            <a:spLocks noGrp="1"/>
+          </p:cNvSpPr>
+          <p:nvPr>
+            <p:ph type="body" idx="3" sz="quarter"/>
+          </p:nvPr>
+        </p:nvSpPr>
+        <p:spPr/>
+        <p:txBody>
+          <a:bodyPr/>
+          <a:lstStyle/>
+          <a:p>
+            <a:r>
+              <a:t>From MODULE8 Learning Outcomes.</a:t>
             </a:r>
           </a:p>
         </p:txBody>
@@ -587,7 +881,7 @@
           <a:lstStyle/>
           <a:p>
             <a:r>
-              <a:t>From MODULE8 Topics Covered.</a:t>
+              <a:t>From MODULE8 Design Architecture.</a:t>
             </a:r>
           </a:p>
         </p:txBody>
@@ -657,7 +951,7 @@
           <a:lstStyle/>
           <a:p>
             <a:r>
-              <a:t>Run from course repository root.</a:t>
+              <a:t>From MODULE8 Design Architecture.</a:t>
             </a:r>
           </a:p>
         </p:txBody>
@@ -727,7 +1021,7 @@
           <a:lstStyle/>
           <a:p>
             <a:r>
-              <a:t>module8/examples/i2c_uvm/README.md</a:t>
+              <a:t>From MODULE8 Design Architecture.</a:t>
             </a:r>
           </a:p>
         </p:txBody>
@@ -797,7 +1091,287 @@
           <a:lstStyle/>
           <a:p>
             <a:r>
-              <a:t>Hands-on: module8/examples/i2c_uvm/</a:t>
+              <a:t>From MODULE8 Verification &amp; Testing Methods.</a:t>
+            </a:r>
+          </a:p>
+        </p:txBody>
+      </p:sp>
+      <p:sp>
+        <p:nvSpPr>
+          <p:cNvPr id="4" name="Slide Number Placeholder 3"/>
+          <p:cNvSpPr>
+            <a:spLocks noGrp="1"/>
+          </p:cNvSpPr>
+          <p:nvPr>
+            <p:ph type="sldNum" idx="5" sz="quarter"/>
+          </p:nvPr>
+        </p:nvSpPr>
+        <p:spPr/>
+      </p:sp>
+    </p:spTree>
+  </p:cSld>
+  <p:clrMapOvr>
+    <a:masterClrMapping/>
+  </p:clrMapOvr>
+</p:notes>
+</file>
+
+<file path=ppt/notesSlides/notesSlide6.xml><?xml version="1.0" encoding="utf-8"?>
+<p:notes xmlns:a="http://schemas.openxmlformats.org/drawingml/2006/main" xmlns:p="http://schemas.openxmlformats.org/presentationml/2006/main" xmlns:r="http://schemas.openxmlformats.org/officeDocument/2006/relationships">
+  <p:cSld>
+    <p:spTree>
+      <p:nvGrpSpPr>
+        <p:cNvPr id="1" name=""/>
+        <p:cNvGrpSpPr/>
+        <p:nvPr/>
+      </p:nvGrpSpPr>
+      <p:grpSpPr>
+        <a:xfrm>
+          <a:off x="0" y="0"/>
+          <a:ext cx="0" cy="0"/>
+          <a:chOff x="0" y="0"/>
+          <a:chExt cx="0" cy="0"/>
+        </a:xfrm>
+      </p:grpSpPr>
+      <p:sp>
+        <p:nvSpPr>
+          <p:cNvPr id="2" name="Slide Image Placeholder 1"/>
+          <p:cNvSpPr>
+            <a:spLocks noGrp="1"/>
+          </p:cNvSpPr>
+          <p:nvPr>
+            <p:ph type="sldImg" idx="2"/>
+          </p:nvPr>
+        </p:nvSpPr>
+        <p:spPr/>
+      </p:sp>
+      <p:sp>
+        <p:nvSpPr>
+          <p:cNvPr id="3" name="Notes Placeholder 2"/>
+          <p:cNvSpPr>
+            <a:spLocks noGrp="1"/>
+          </p:cNvSpPr>
+          <p:nvPr>
+            <p:ph type="body" idx="3" sz="quarter"/>
+          </p:nvPr>
+        </p:nvSpPr>
+        <p:spPr/>
+        <p:txBody>
+          <a:bodyPr/>
+          <a:lstStyle/>
+          <a:p>
+            <a:r>
+              <a:t>From MODULE8 Verification &amp; Testing Methods.</a:t>
+            </a:r>
+          </a:p>
+        </p:txBody>
+      </p:sp>
+      <p:sp>
+        <p:nvSpPr>
+          <p:cNvPr id="4" name="Slide Number Placeholder 3"/>
+          <p:cNvSpPr>
+            <a:spLocks noGrp="1"/>
+          </p:cNvSpPr>
+          <p:nvPr>
+            <p:ph type="sldNum" idx="5" sz="quarter"/>
+          </p:nvPr>
+        </p:nvSpPr>
+        <p:spPr/>
+      </p:sp>
+    </p:spTree>
+  </p:cSld>
+  <p:clrMapOvr>
+    <a:masterClrMapping/>
+  </p:clrMapOvr>
+</p:notes>
+</file>
+
+<file path=ppt/notesSlides/notesSlide7.xml><?xml version="1.0" encoding="utf-8"?>
+<p:notes xmlns:a="http://schemas.openxmlformats.org/drawingml/2006/main" xmlns:p="http://schemas.openxmlformats.org/presentationml/2006/main" xmlns:r="http://schemas.openxmlformats.org/officeDocument/2006/relationships">
+  <p:cSld>
+    <p:spTree>
+      <p:nvGrpSpPr>
+        <p:cNvPr id="1" name=""/>
+        <p:cNvGrpSpPr/>
+        <p:nvPr/>
+      </p:nvGrpSpPr>
+      <p:grpSpPr>
+        <a:xfrm>
+          <a:off x="0" y="0"/>
+          <a:ext cx="0" cy="0"/>
+          <a:chOff x="0" y="0"/>
+          <a:chExt cx="0" cy="0"/>
+        </a:xfrm>
+      </p:grpSpPr>
+      <p:sp>
+        <p:nvSpPr>
+          <p:cNvPr id="2" name="Slide Image Placeholder 1"/>
+          <p:cNvSpPr>
+            <a:spLocks noGrp="1"/>
+          </p:cNvSpPr>
+          <p:nvPr>
+            <p:ph type="sldImg" idx="2"/>
+          </p:nvPr>
+        </p:nvSpPr>
+        <p:spPr/>
+      </p:sp>
+      <p:sp>
+        <p:nvSpPr>
+          <p:cNvPr id="3" name="Notes Placeholder 2"/>
+          <p:cNvSpPr>
+            <a:spLocks noGrp="1"/>
+          </p:cNvSpPr>
+          <p:nvPr>
+            <p:ph type="body" idx="3" sz="quarter"/>
+          </p:nvPr>
+        </p:nvSpPr>
+        <p:spPr/>
+        <p:txBody>
+          <a:bodyPr/>
+          <a:lstStyle/>
+          <a:p>
+            <a:r>
+              <a:t>From MODULE8 Verification &amp; Testing Methods.</a:t>
+            </a:r>
+          </a:p>
+        </p:txBody>
+      </p:sp>
+      <p:sp>
+        <p:nvSpPr>
+          <p:cNvPr id="4" name="Slide Number Placeholder 3"/>
+          <p:cNvSpPr>
+            <a:spLocks noGrp="1"/>
+          </p:cNvSpPr>
+          <p:nvPr>
+            <p:ph type="sldNum" idx="5" sz="quarter"/>
+          </p:nvPr>
+        </p:nvSpPr>
+        <p:spPr/>
+      </p:sp>
+    </p:spTree>
+  </p:cSld>
+  <p:clrMapOvr>
+    <a:masterClrMapping/>
+  </p:clrMapOvr>
+</p:notes>
+</file>
+
+<file path=ppt/notesSlides/notesSlide8.xml><?xml version="1.0" encoding="utf-8"?>
+<p:notes xmlns:a="http://schemas.openxmlformats.org/drawingml/2006/main" xmlns:p="http://schemas.openxmlformats.org/presentationml/2006/main" xmlns:r="http://schemas.openxmlformats.org/officeDocument/2006/relationships">
+  <p:cSld>
+    <p:spTree>
+      <p:nvGrpSpPr>
+        <p:cNvPr id="1" name=""/>
+        <p:cNvGrpSpPr/>
+        <p:nvPr/>
+      </p:nvGrpSpPr>
+      <p:grpSpPr>
+        <a:xfrm>
+          <a:off x="0" y="0"/>
+          <a:ext cx="0" cy="0"/>
+          <a:chOff x="0" y="0"/>
+          <a:chExt cx="0" cy="0"/>
+        </a:xfrm>
+      </p:grpSpPr>
+      <p:sp>
+        <p:nvSpPr>
+          <p:cNvPr id="2" name="Slide Image Placeholder 1"/>
+          <p:cNvSpPr>
+            <a:spLocks noGrp="1"/>
+          </p:cNvSpPr>
+          <p:nvPr>
+            <p:ph type="sldImg" idx="2"/>
+          </p:nvPr>
+        </p:nvSpPr>
+        <p:spPr/>
+      </p:sp>
+      <p:sp>
+        <p:nvSpPr>
+          <p:cNvPr id="3" name="Notes Placeholder 2"/>
+          <p:cNvSpPr>
+            <a:spLocks noGrp="1"/>
+          </p:cNvSpPr>
+          <p:nvPr>
+            <p:ph type="body" idx="3" sz="quarter"/>
+          </p:nvPr>
+        </p:nvSpPr>
+        <p:spPr/>
+        <p:txBody>
+          <a:bodyPr/>
+          <a:lstStyle/>
+          <a:p>
+            <a:r>
+              <a:t>From MODULE8 Topics Covered.</a:t>
+            </a:r>
+          </a:p>
+        </p:txBody>
+      </p:sp>
+      <p:sp>
+        <p:nvSpPr>
+          <p:cNvPr id="4" name="Slide Number Placeholder 3"/>
+          <p:cNvSpPr>
+            <a:spLocks noGrp="1"/>
+          </p:cNvSpPr>
+          <p:nvPr>
+            <p:ph type="sldNum" idx="5" sz="quarter"/>
+          </p:nvPr>
+        </p:nvSpPr>
+        <p:spPr/>
+      </p:sp>
+    </p:spTree>
+  </p:cSld>
+  <p:clrMapOvr>
+    <a:masterClrMapping/>
+  </p:clrMapOvr>
+</p:notes>
+</file>
+
+<file path=ppt/notesSlides/notesSlide9.xml><?xml version="1.0" encoding="utf-8"?>
+<p:notes xmlns:a="http://schemas.openxmlformats.org/drawingml/2006/main" xmlns:p="http://schemas.openxmlformats.org/presentationml/2006/main" xmlns:r="http://schemas.openxmlformats.org/officeDocument/2006/relationships">
+  <p:cSld>
+    <p:spTree>
+      <p:nvGrpSpPr>
+        <p:cNvPr id="1" name=""/>
+        <p:cNvGrpSpPr/>
+        <p:nvPr/>
+      </p:nvGrpSpPr>
+      <p:grpSpPr>
+        <a:xfrm>
+          <a:off x="0" y="0"/>
+          <a:ext cx="0" cy="0"/>
+          <a:chOff x="0" y="0"/>
+          <a:chExt cx="0" cy="0"/>
+        </a:xfrm>
+      </p:grpSpPr>
+      <p:sp>
+        <p:nvSpPr>
+          <p:cNvPr id="2" name="Slide Image Placeholder 1"/>
+          <p:cNvSpPr>
+            <a:spLocks noGrp="1"/>
+          </p:cNvSpPr>
+          <p:nvPr>
+            <p:ph type="sldImg" idx="2"/>
+          </p:nvPr>
+        </p:nvSpPr>
+        <p:spPr/>
+      </p:sp>
+      <p:sp>
+        <p:nvSpPr>
+          <p:cNvPr id="3" name="Notes Placeholder 2"/>
+          <p:cNvSpPr>
+            <a:spLocks noGrp="1"/>
+          </p:cNvSpPr>
+          <p:nvPr>
+            <p:ph type="body" idx="3" sz="quarter"/>
+          </p:nvPr>
+        </p:nvSpPr>
+        <p:spPr/>
+        <p:txBody>
+          <a:bodyPr/>
+          <a:lstStyle/>
+          <a:p>
+            <a:r>
+              <a:t>From MODULE8 Topics Covered.</a:t>
             </a:r>
           </a:p>
         </p:txBody>
@@ -3955,58 +4529,14 @@
               </a:defRPr>
             </a:pPr>
             <a:r>
-              <a:t>Module 8 self-check</a:t>
-            </a:r>
-          </a:p>
-        </p:txBody>
-      </p:sp>
-      <p:sp>
-        <p:nvSpPr>
-          <p:cNvPr id="3" name="TextBox 2"/>
-          <p:cNvSpPr txBox="1"/>
-          <p:nvPr/>
-        </p:nvSpPr>
-        <p:spPr>
-          <a:xfrm>
-            <a:off x="548640" y="1051560"/>
-            <a:ext cx="11064240" cy="914400"/>
-          </a:xfrm>
-          <a:prstGeom prst="rect">
-            <a:avLst/>
-          </a:prstGeom>
-          <a:solidFill>
-            <a:srgbClr val="F4F4F4"/>
-          </a:solidFill>
-        </p:spPr>
-        <p:txBody>
-          <a:bodyPr wrap="square">
-            <a:noAutofit/>
-          </a:bodyPr>
-          <a:lstStyle/>
-          <a:p>
-            <a:pPr>
-              <a:lnSpc>
-                <a:spcPts val="2200"/>
-              </a:lnSpc>
-              <a:spcAft>
-                <a:spcPts val="200"/>
-              </a:spcAft>
-              <a:defRPr sz="2000" b="0">
-                <a:solidFill>
-                  <a:srgbClr val="333333"/>
-                </a:solidFill>
-                <a:latin typeface="Consolas"/>
-              </a:defRPr>
-            </a:pPr>
-            <a:r>
-              <a:t>$ ./scripts/module8.sh --check</a:t>
+              <a:t>Verification environment architecture</a:t>
             </a:r>
           </a:p>
         </p:txBody>
       </p:sp>
       <p:pic>
         <p:nvPicPr>
-          <p:cNvPr id="4" name="Picture 3" descr="module8_check.png"/>
+          <p:cNvPr id="3" name="Picture 2" descr="verification_architecture.png"/>
           <p:cNvPicPr>
             <a:picLocks noChangeAspect="1"/>
           </p:cNvPicPr>
@@ -4020,14 +4550,53 @@
         </p:blipFill>
         <p:spPr>
           <a:xfrm>
-            <a:off x="548640" y="1965960"/>
-            <a:ext cx="7071358" cy="3977639"/>
+            <a:off x="548640" y="1143000"/>
+            <a:ext cx="8128000" cy="4572000"/>
           </a:xfrm>
           <a:prstGeom prst="rect">
             <a:avLst/>
           </a:prstGeom>
         </p:spPr>
       </p:pic>
+      <p:sp>
+        <p:nvSpPr>
+          <p:cNvPr id="4" name="TextBox 3"/>
+          <p:cNvSpPr txBox="1"/>
+          <p:nvPr/>
+        </p:nvSpPr>
+        <p:spPr>
+          <a:xfrm>
+            <a:off x="548640" y="5897880"/>
+            <a:ext cx="11064240" cy="411480"/>
+          </a:xfrm>
+          <a:prstGeom prst="rect">
+            <a:avLst/>
+          </a:prstGeom>
+          <a:noFill/>
+        </p:spPr>
+        <p:txBody>
+          <a:bodyPr wrap="square">
+            <a:noAutofit/>
+          </a:bodyPr>
+          <a:lstStyle/>
+          <a:p>
+            <a:pPr>
+              <a:lnSpc>
+                <a:spcPts val="2200"/>
+              </a:lnSpc>
+              <a:defRPr sz="1200" b="0">
+                <a:solidFill>
+                  <a:srgbClr val="333333"/>
+                </a:solidFill>
+                <a:latin typeface="Calibri"/>
+              </a:defRPr>
+            </a:pPr>
+            <a:r>
+              <a:t>Module 8: UVM layers, agents, and checkers for this phase.</a:t>
+            </a:r>
+          </a:p>
+        </p:txBody>
+      </p:sp>
       <p:sp>
         <p:nvSpPr>
           <p:cNvPr id="5" name="TextBox 4"/>
@@ -4119,7 +4688,7 @@
               </a:defRPr>
             </a:pPr>
             <a:r>
-              <a:t>Example 1: I²C UVM</a:t>
+              <a:t>1. I²C DUT (reused from Module 7)</a:t>
             </a:r>
           </a:p>
         </p:txBody>
@@ -4161,7 +4730,7 @@
               </a:defRPr>
             </a:pPr>
             <a:r>
-              <a:t>• UVM phases and reporting (DRIVER, MONITOR,</a:t>
+              <a:t>• i2c_master + clk_div; i2c_if for UVM connection.</a:t>
             </a:r>
           </a:p>
           <a:p>
@@ -4180,64 +4749,7 @@
               </a:defRPr>
             </a:pPr>
             <a:r>
-              <a:t>      SCOREBOARD).</a:t>
-            </a:r>
-          </a:p>
-          <a:p>
-            <a:pPr>
-              <a:lnSpc>
-                <a:spcPts val="2200"/>
-              </a:lnSpc>
-              <a:spcAft>
-                <a:spcPts val="1000"/>
-              </a:spcAft>
-              <a:defRPr sz="2000" b="0">
-                <a:solidFill>
-                  <a:srgbClr val="333333"/>
-                </a:solidFill>
-                <a:latin typeface="Calibri"/>
-              </a:defRPr>
-            </a:pPr>
-            <a:r>
-              <a:t>• Scoreboard checks (expected vs observed address+data</a:t>
-            </a:r>
-          </a:p>
-          <a:p>
-            <a:pPr>
-              <a:lnSpc>
-                <a:spcPts val="2200"/>
-              </a:lnSpc>
-              <a:spcAft>
-                <a:spcPts val="1000"/>
-              </a:spcAft>
-              <a:defRPr sz="2000" b="0">
-                <a:solidFill>
-                  <a:srgbClr val="333333"/>
-                </a:solidFill>
-                <a:latin typeface="Calibri"/>
-              </a:defRPr>
-            </a:pPr>
-            <a:r>
-              <a:t>      from the bus).</a:t>
-            </a:r>
-          </a:p>
-          <a:p>
-            <a:pPr>
-              <a:lnSpc>
-                <a:spcPts val="2200"/>
-              </a:lnSpc>
-              <a:spcAft>
-                <a:spcPts val="1000"/>
-              </a:spcAft>
-              <a:defRPr sz="2000" b="0">
-                <a:solidFill>
-                  <a:srgbClr val="333333"/>
-                </a:solidFill>
-                <a:latin typeface="Calibri"/>
-              </a:defRPr>
-            </a:pPr>
-            <a:r>
-              <a:t>• Final scoreboard summary (matches and mismatches).</a:t>
+              <a:t>• Wire sequence: START → address+W → data → STOP.</a:t>
             </a:r>
           </a:p>
         </p:txBody>
@@ -4333,7 +4845,7 @@
               </a:defRPr>
             </a:pPr>
             <a:r>
-              <a:t>Demo: I²C UVM</a:t>
+              <a:t>2. UVM agent</a:t>
             </a:r>
           </a:p>
         </p:txBody>
@@ -4346,15 +4858,13 @@
         </p:nvSpPr>
         <p:spPr>
           <a:xfrm>
-            <a:off x="548640" y="1051560"/>
-            <a:ext cx="11064240" cy="914400"/>
-          </a:xfrm>
-          <a:prstGeom prst="rect">
-            <a:avLst/>
-          </a:prstGeom>
-          <a:solidFill>
-            <a:srgbClr val="F4F4F4"/>
-          </a:solidFill>
+            <a:off x="548640" y="1234440"/>
+            <a:ext cx="11064240" cy="4937760"/>
+          </a:xfrm>
+          <a:prstGeom prst="rect">
+            <a:avLst/>
+          </a:prstGeom>
+          <a:noFill/>
         </p:spPr>
         <p:txBody>
           <a:bodyPr wrap="square">
@@ -4367,48 +4877,119 @@
                 <a:spcPts val="2200"/>
               </a:lnSpc>
               <a:spcAft>
-                <a:spcPts val="200"/>
+                <a:spcPts val="1000"/>
               </a:spcAft>
               <a:defRPr sz="2000" b="0">
                 <a:solidFill>
                   <a:srgbClr val="333333"/>
                 </a:solidFill>
-                <a:latin typeface="Consolas"/>
-              </a:defRPr>
-            </a:pPr>
-            <a:r>
-              <a:t>$ ./scripts/module8.sh --run</a:t>
-            </a:r>
-          </a:p>
-        </p:txBody>
-      </p:sp>
-      <p:pic>
-        <p:nvPicPr>
-          <p:cNvPr id="4" name="Picture 3" descr="ex01_i2c_uvm.png"/>
-          <p:cNvPicPr>
-            <a:picLocks noChangeAspect="1"/>
-          </p:cNvPicPr>
-          <p:nvPr/>
-        </p:nvPicPr>
-        <p:blipFill>
-          <a:blip r:embed="rId2"/>
-          <a:stretch>
-            <a:fillRect/>
-          </a:stretch>
-        </p:blipFill>
-        <p:spPr>
-          <a:xfrm>
-            <a:off x="548640" y="1965960"/>
-            <a:ext cx="7071358" cy="3977639"/>
-          </a:xfrm>
-          <a:prstGeom prst="rect">
-            <a:avLst/>
-          </a:prstGeom>
-        </p:spPr>
-      </p:pic>
-      <p:sp>
-        <p:nvSpPr>
-          <p:cNvPr id="5" name="TextBox 4"/>
+                <a:latin typeface="Calibri"/>
+              </a:defRPr>
+            </a:pPr>
+            <a:r>
+              <a:t>• I2cTransaction holds `addr` + `data`; monitor fills</a:t>
+            </a:r>
+          </a:p>
+          <a:p>
+            <a:pPr>
+              <a:lnSpc>
+                <a:spcPts val="2200"/>
+              </a:lnSpc>
+              <a:spcAft>
+                <a:spcPts val="1000"/>
+              </a:spcAft>
+              <a:defRPr sz="2000" b="0">
+                <a:solidFill>
+                  <a:srgbClr val="333333"/>
+                </a:solidFill>
+                <a:latin typeface="Calibri"/>
+              </a:defRPr>
+            </a:pPr>
+            <a:r>
+              <a:t>      `observed_*`.</a:t>
+            </a:r>
+          </a:p>
+          <a:p>
+            <a:pPr>
+              <a:lnSpc>
+                <a:spcPts val="2200"/>
+              </a:lnSpc>
+              <a:spcAft>
+                <a:spcPts val="1000"/>
+              </a:spcAft>
+              <a:defRPr sz="2000" b="0">
+                <a:solidFill>
+                  <a:srgbClr val="333333"/>
+                </a:solidFill>
+                <a:latin typeface="Calibri"/>
+              </a:defRPr>
+            </a:pPr>
+            <a:r>
+              <a:t>• I2cMonitor reimplements baseline bus sampling inside</a:t>
+            </a:r>
+          </a:p>
+          <a:p>
+            <a:pPr>
+              <a:lnSpc>
+                <a:spcPts val="2200"/>
+              </a:lnSpc>
+              <a:spcAft>
+                <a:spcPts val="1000"/>
+              </a:spcAft>
+              <a:defRPr sz="2000" b="0">
+                <a:solidFill>
+                  <a:srgbClr val="333333"/>
+                </a:solidFill>
+                <a:latin typeface="Calibri"/>
+              </a:defRPr>
+            </a:pPr>
+            <a:r>
+              <a:t>      UVM.</a:t>
+            </a:r>
+          </a:p>
+          <a:p>
+            <a:pPr>
+              <a:lnSpc>
+                <a:spcPts val="2200"/>
+              </a:lnSpc>
+              <a:spcAft>
+                <a:spcPts val="1000"/>
+              </a:spcAft>
+              <a:defRPr sz="2000" b="0">
+                <a:solidFill>
+                  <a:srgbClr val="333333"/>
+                </a:solidFill>
+                <a:latin typeface="Calibri"/>
+              </a:defRPr>
+            </a:pPr>
+            <a:r>
+              <a:t>• I2cScoreboard checks address and data phases</a:t>
+            </a:r>
+          </a:p>
+          <a:p>
+            <a:pPr>
+              <a:lnSpc>
+                <a:spcPts val="2200"/>
+              </a:lnSpc>
+              <a:spcAft>
+                <a:spcPts val="1000"/>
+              </a:spcAft>
+              <a:defRPr sz="2000" b="0">
+                <a:solidFill>
+                  <a:srgbClr val="333333"/>
+                </a:solidFill>
+                <a:latin typeface="Calibri"/>
+              </a:defRPr>
+            </a:pPr>
+            <a:r>
+              <a:t>      independently.</a:t>
+            </a:r>
+          </a:p>
+        </p:txBody>
+      </p:sp>
+      <p:sp>
+        <p:nvSpPr>
+          <p:cNvPr id="4" name="TextBox 3"/>
           <p:cNvSpPr txBox="1"/>
           <p:nvPr/>
         </p:nvSpPr>
@@ -4471,8 +5052,8 @@
         </p:nvSpPr>
         <p:spPr>
           <a:xfrm>
-            <a:off x="548640" y="2743200"/>
-            <a:ext cx="11064240" cy="1371600"/>
+            <a:off x="548640" y="411480"/>
+            <a:ext cx="11064240" cy="777240"/>
           </a:xfrm>
           <a:prstGeom prst="rect">
             <a:avLst/>
@@ -4485,11 +5066,11 @@
           </a:bodyPr>
           <a:lstStyle/>
           <a:p>
-            <a:pPr algn="ctr">
-              <a:lnSpc>
-                <a:spcPts val="2200"/>
-              </a:lnSpc>
-              <a:defRPr sz="3600" b="1">
+            <a:pPr>
+              <a:lnSpc>
+                <a:spcPts val="2200"/>
+              </a:lnSpc>
+              <a:defRPr sz="2800" b="1">
                 <a:solidFill>
                   <a:srgbClr val="1A1A2E"/>
                 </a:solidFill>
@@ -4497,7 +5078,7 @@
               </a:defRPr>
             </a:pPr>
             <a:r>
-              <a:t>Practice &amp; assessment</a:t>
+              <a:t>3. Course capstone</a:t>
             </a:r>
           </a:p>
         </p:txBody>
@@ -4505,6 +5086,67 @@
       <p:sp>
         <p:nvSpPr>
           <p:cNvPr id="3" name="TextBox 2"/>
+          <p:cNvSpPr txBox="1"/>
+          <p:nvPr/>
+        </p:nvSpPr>
+        <p:spPr>
+          <a:xfrm>
+            <a:off x="548640" y="1234440"/>
+            <a:ext cx="11064240" cy="4937760"/>
+          </a:xfrm>
+          <a:prstGeom prst="rect">
+            <a:avLst/>
+          </a:prstGeom>
+          <a:noFill/>
+        </p:spPr>
+        <p:txBody>
+          <a:bodyPr wrap="square">
+            <a:noAutofit/>
+          </a:bodyPr>
+          <a:lstStyle/>
+          <a:p>
+            <a:pPr>
+              <a:lnSpc>
+                <a:spcPts val="2200"/>
+              </a:lnSpc>
+              <a:spcAft>
+                <a:spcPts val="1000"/>
+              </a:spcAft>
+              <a:defRPr sz="2000" b="0">
+                <a:solidFill>
+                  <a:srgbClr val="333333"/>
+                </a:solidFill>
+                <a:latin typeface="Calibri"/>
+              </a:defRPr>
+            </a:pPr>
+            <a:r>
+              <a:t>• Compare UART (async), SPI (SCLK+CS), I²C (shared</a:t>
+            </a:r>
+          </a:p>
+          <a:p>
+            <a:pPr>
+              <a:lnSpc>
+                <a:spcPts val="2200"/>
+              </a:lnSpc>
+              <a:spcAft>
+                <a:spcPts val="1000"/>
+              </a:spcAft>
+              <a:defRPr sz="2000" b="0">
+                <a:solidFill>
+                  <a:srgbClr val="333333"/>
+                </a:solidFill>
+                <a:latin typeface="Calibri"/>
+              </a:defRPr>
+            </a:pPr>
+            <a:r>
+              <a:t>      bus) — same UVM skeleton, different monitors.</a:t>
+            </a:r>
+          </a:p>
+        </p:txBody>
+      </p:sp>
+      <p:sp>
+        <p:nvSpPr>
+          <p:cNvPr id="4" name="TextBox 3"/>
           <p:cNvSpPr txBox="1"/>
           <p:nvPr/>
         </p:nvSpPr>
@@ -4567,8 +5209,8 @@
         </p:nvSpPr>
         <p:spPr>
           <a:xfrm>
-            <a:off x="548640" y="411480"/>
-            <a:ext cx="11064240" cy="777240"/>
+            <a:off x="548640" y="2743200"/>
+            <a:ext cx="11064240" cy="1371600"/>
           </a:xfrm>
           <a:prstGeom prst="rect">
             <a:avLst/>
@@ -4581,11 +5223,11 @@
           </a:bodyPr>
           <a:lstStyle/>
           <a:p>
-            <a:pPr>
-              <a:lnSpc>
-                <a:spcPts val="2200"/>
-              </a:lnSpc>
-              <a:defRPr sz="2800" b="1">
+            <a:pPr algn="ctr">
+              <a:lnSpc>
+                <a:spcPts val="2200"/>
+              </a:lnSpc>
+              <a:defRPr sz="3600" b="1">
                 <a:solidFill>
                   <a:srgbClr val="1A1A2E"/>
                 </a:solidFill>
@@ -4593,7 +5235,7 @@
               </a:defRPr>
             </a:pPr>
             <a:r>
-              <a:t>Exercises</a:t>
+              <a:t>Verification &amp; testing methods</a:t>
             </a:r>
           </a:p>
         </p:txBody>
@@ -4601,105 +5243,6 @@
       <p:sp>
         <p:nvSpPr>
           <p:cNvPr id="3" name="TextBox 2"/>
-          <p:cNvSpPr txBox="1"/>
-          <p:nvPr/>
-        </p:nvSpPr>
-        <p:spPr>
-          <a:xfrm>
-            <a:off x="548640" y="1234440"/>
-            <a:ext cx="11064240" cy="4937760"/>
-          </a:xfrm>
-          <a:prstGeom prst="rect">
-            <a:avLst/>
-          </a:prstGeom>
-          <a:noFill/>
-        </p:spPr>
-        <p:txBody>
-          <a:bodyPr wrap="square">
-            <a:noAutofit/>
-          </a:bodyPr>
-          <a:lstStyle/>
-          <a:p>
-            <a:pPr>
-              <a:lnSpc>
-                <a:spcPts val="2200"/>
-              </a:lnSpc>
-              <a:spcAft>
-                <a:spcPts val="1000"/>
-              </a:spcAft>
-              <a:defRPr sz="2000" b="0">
-                <a:solidFill>
-                  <a:srgbClr val="333333"/>
-                </a:solidFill>
-                <a:latin typeface="Calibri"/>
-              </a:defRPr>
-            </a:pPr>
-            <a:r>
-              <a:t>• Run i2c_uvm</a:t>
-            </a:r>
-          </a:p>
-          <a:p>
-            <a:pPr>
-              <a:lnSpc>
-                <a:spcPts val="2200"/>
-              </a:lnSpc>
-              <a:spcAft>
-                <a:spcPts val="1000"/>
-              </a:spcAft>
-              <a:defRPr sz="2000" b="0">
-                <a:solidFill>
-                  <a:srgbClr val="333333"/>
-                </a:solidFill>
-                <a:latin typeface="Calibri"/>
-              </a:defRPr>
-            </a:pPr>
-            <a:r>
-              <a:t>• Trace one transaction</a:t>
-            </a:r>
-          </a:p>
-          <a:p>
-            <a:pPr>
-              <a:lnSpc>
-                <a:spcPts val="2200"/>
-              </a:lnSpc>
-              <a:spcAft>
-                <a:spcPts val="1000"/>
-              </a:spcAft>
-              <a:defRPr sz="2000" b="0">
-                <a:solidFill>
-                  <a:srgbClr val="333333"/>
-                </a:solidFill>
-                <a:latin typeface="Calibri"/>
-              </a:defRPr>
-            </a:pPr>
-            <a:r>
-              <a:t>• Change the sequence</a:t>
-            </a:r>
-          </a:p>
-          <a:p>
-            <a:pPr>
-              <a:lnSpc>
-                <a:spcPts val="2200"/>
-              </a:lnSpc>
-              <a:spcAft>
-                <a:spcPts val="1000"/>
-              </a:spcAft>
-              <a:defRPr sz="2000" b="0">
-                <a:solidFill>
-                  <a:srgbClr val="333333"/>
-                </a:solidFill>
-                <a:latin typeface="Calibri"/>
-              </a:defRPr>
-            </a:pPr>
-            <a:r>
-              <a:t>• Compare across protocols</a:t>
-            </a:r>
-          </a:p>
-        </p:txBody>
-      </p:sp>
-      <p:sp>
-        <p:nvSpPr>
-          <p:cNvPr id="4" name="TextBox 3"/>
           <p:cNvSpPr txBox="1"/>
           <p:nvPr/>
         </p:nvSpPr>
@@ -4788,21 +5331,45 @@
               </a:defRPr>
             </a:pPr>
             <a:r>
-              <a:t>Assessment checklist</a:t>
-            </a:r>
-          </a:p>
-        </p:txBody>
-      </p:sp>
-      <p:sp>
-        <p:nvSpPr>
-          <p:cNvPr id="3" name="TextBox 2"/>
+              <a:t>Testing and closure flow</a:t>
+            </a:r>
+          </a:p>
+        </p:txBody>
+      </p:sp>
+      <p:pic>
+        <p:nvPicPr>
+          <p:cNvPr id="3" name="Picture 2" descr="testing_methods.png"/>
+          <p:cNvPicPr>
+            <a:picLocks noChangeAspect="1"/>
+          </p:cNvPicPr>
+          <p:nvPr/>
+        </p:nvPicPr>
+        <p:blipFill>
+          <a:blip r:embed="rId2"/>
+          <a:stretch>
+            <a:fillRect/>
+          </a:stretch>
+        </p:blipFill>
+        <p:spPr>
+          <a:xfrm>
+            <a:off x="548640" y="1143000"/>
+            <a:ext cx="8128000" cy="4572000"/>
+          </a:xfrm>
+          <a:prstGeom prst="rect">
+            <a:avLst/>
+          </a:prstGeom>
+        </p:spPr>
+      </p:pic>
+      <p:sp>
+        <p:nvSpPr>
+          <p:cNvPr id="4" name="TextBox 3"/>
           <p:cNvSpPr txBox="1"/>
           <p:nvPr/>
         </p:nvSpPr>
         <p:spPr>
           <a:xfrm>
-            <a:off x="548640" y="1234440"/>
-            <a:ext cx="11064240" cy="4937760"/>
+            <a:off x="548640" y="5897880"/>
+            <a:ext cx="11064240" cy="411480"/>
           </a:xfrm>
           <a:prstGeom prst="rect">
             <a:avLst/>
@@ -4819,10 +5386,7 @@
               <a:lnSpc>
                 <a:spcPts val="2200"/>
               </a:lnSpc>
-              <a:spcAft>
-                <a:spcPts val="1000"/>
-              </a:spcAft>
-              <a:defRPr sz="2000" b="0">
+              <a:defRPr sz="1200" b="0">
                 <a:solidFill>
                   <a:srgbClr val="333333"/>
                 </a:solidFill>
@@ -4830,71 +5394,14 @@
               </a:defRPr>
             </a:pPr>
             <a:r>
-              <a:t>• Can describe the I²C UVM agent and how it maps to</a:t>
-            </a:r>
-          </a:p>
-          <a:p>
-            <a:pPr>
-              <a:lnSpc>
-                <a:spcPts val="2200"/>
-              </a:lnSpc>
-              <a:spcAft>
-                <a:spcPts val="1000"/>
-              </a:spcAft>
-              <a:defRPr sz="2000" b="0">
-                <a:solidFill>
-                  <a:srgbClr val="333333"/>
-                </a:solidFill>
-                <a:latin typeface="Calibri"/>
-              </a:defRPr>
-            </a:pPr>
-            <a:r>
-              <a:t>      I²C (addr+data, monitor on SCL/SDA).</a:t>
-            </a:r>
-          </a:p>
-          <a:p>
-            <a:pPr>
-              <a:lnSpc>
-                <a:spcPts val="2200"/>
-              </a:lnSpc>
-              <a:spcAft>
-                <a:spcPts val="1000"/>
-              </a:spcAft>
-              <a:defRPr sz="2000" b="0">
-                <a:solidFill>
-                  <a:srgbClr val="333333"/>
-                </a:solidFill>
-                <a:latin typeface="Calibri"/>
-              </a:defRPr>
-            </a:pPr>
-            <a:r>
-              <a:t>• Can run i2c_uvm and interpret UVM output.</a:t>
-            </a:r>
-          </a:p>
-          <a:p>
-            <a:pPr>
-              <a:lnSpc>
-                <a:spcPts val="2200"/>
-              </a:lnSpc>
-              <a:spcAft>
-                <a:spcPts val="1000"/>
-              </a:spcAft>
-              <a:defRPr sz="2000" b="0">
-                <a:solidFill>
-                  <a:srgbClr val="333333"/>
-                </a:solidFill>
-                <a:latin typeface="Calibri"/>
-              </a:defRPr>
-            </a:pPr>
-            <a:r>
-              <a:t>• Can compare UVM structure across UART, SPI, and I²C.</a:t>
-            </a:r>
-          </a:p>
-        </p:txBody>
-      </p:sp>
-      <p:sp>
-        <p:nvSpPr>
-          <p:cNvPr id="4" name="TextBox 3"/>
+              <a:t>Module 8: how tests, checks, and metrics close verification goals.</a:t>
+            </a:r>
+          </a:p>
+        </p:txBody>
+      </p:sp>
+      <p:sp>
+        <p:nvSpPr>
+          <p:cNvPr id="5" name="TextBox 4"/>
           <p:cNvSpPr txBox="1"/>
           <p:nvPr/>
         </p:nvSpPr>
@@ -4983,7 +5490,7 @@
               </a:defRPr>
             </a:pPr>
             <a:r>
-              <a:t>Summary &amp; next steps</a:t>
+              <a:t>1. Two-phase scoreboard</a:t>
             </a:r>
           </a:p>
         </p:txBody>
@@ -5025,7 +5532,7 @@
               </a:defRPr>
             </a:pPr>
             <a:r>
-              <a:t>• Extend I²C verification to **UVM+SV** — I²C agent</a:t>
+              <a:t>• Separate checks for address+W byte and data byte —</a:t>
             </a:r>
           </a:p>
           <a:p>
@@ -5044,9 +5551,128 @@
               </a:defRPr>
             </a:pPr>
             <a:r>
-              <a:t>      (transaction, sequence, driver, monitor, scoreboa…</a:t>
-            </a:r>
-          </a:p>
+              <a:t>      catches shifted or merged fields.</a:t>
+            </a:r>
+          </a:p>
+        </p:txBody>
+      </p:sp>
+      <p:sp>
+        <p:nvSpPr>
+          <p:cNvPr id="4" name="TextBox 3"/>
+          <p:cNvSpPr txBox="1"/>
+          <p:nvPr/>
+        </p:nvSpPr>
+        <p:spPr>
+          <a:xfrm>
+            <a:off x="548640" y="6355080"/>
+            <a:ext cx="11064240" cy="320040"/>
+          </a:xfrm>
+          <a:prstGeom prst="rect">
+            <a:avLst/>
+          </a:prstGeom>
+          <a:noFill/>
+        </p:spPr>
+        <p:txBody>
+          <a:bodyPr wrap="square">
+            <a:noAutofit/>
+          </a:bodyPr>
+          <a:lstStyle/>
+          <a:p>
+            <a:pPr algn="r">
+              <a:lnSpc>
+                <a:spcPts val="2200"/>
+              </a:lnSpc>
+              <a:defRPr sz="1000" b="0">
+                <a:solidFill>
+                  <a:srgbClr val="666666"/>
+                </a:solidFill>
+                <a:latin typeface="Calibri"/>
+              </a:defRPr>
+            </a:pPr>
+            <a:r>
+              <a:t>learn_uart_spi_i2c / Module 8</a:t>
+            </a:r>
+          </a:p>
+        </p:txBody>
+      </p:sp>
+    </p:spTree>
+  </p:cSld>
+  <p:clrMapOvr>
+    <a:masterClrMapping/>
+  </p:clrMapOvr>
+</p:sld>
+</file>
+
+<file path=ppt/slides/slide17.xml><?xml version="1.0" encoding="utf-8"?>
+<p:sld xmlns:a="http://schemas.openxmlformats.org/drawingml/2006/main" xmlns:p="http://schemas.openxmlformats.org/presentationml/2006/main" xmlns:r="http://schemas.openxmlformats.org/officeDocument/2006/relationships">
+  <p:cSld>
+    <p:spTree>
+      <p:nvGrpSpPr>
+        <p:cNvPr id="1" name=""/>
+        <p:cNvGrpSpPr/>
+        <p:nvPr/>
+      </p:nvGrpSpPr>
+      <p:grpSpPr/>
+      <p:sp>
+        <p:nvSpPr>
+          <p:cNvPr id="2" name="TextBox 1"/>
+          <p:cNvSpPr txBox="1"/>
+          <p:nvPr/>
+        </p:nvSpPr>
+        <p:spPr>
+          <a:xfrm>
+            <a:off x="548640" y="411480"/>
+            <a:ext cx="11064240" cy="777240"/>
+          </a:xfrm>
+          <a:prstGeom prst="rect">
+            <a:avLst/>
+          </a:prstGeom>
+          <a:noFill/>
+        </p:spPr>
+        <p:txBody>
+          <a:bodyPr wrap="square">
+            <a:noAutofit/>
+          </a:bodyPr>
+          <a:lstStyle/>
+          <a:p>
+            <a:pPr>
+              <a:lnSpc>
+                <a:spcPts val="2200"/>
+              </a:lnSpc>
+              <a:defRPr sz="2800" b="1">
+                <a:solidFill>
+                  <a:srgbClr val="1A1A2E"/>
+                </a:solidFill>
+                <a:latin typeface="Calibri"/>
+              </a:defRPr>
+            </a:pPr>
+            <a:r>
+              <a:t>2. Reuse baseline monitor logic</a:t>
+            </a:r>
+          </a:p>
+        </p:txBody>
+      </p:sp>
+      <p:sp>
+        <p:nvSpPr>
+          <p:cNvPr id="3" name="TextBox 2"/>
+          <p:cNvSpPr txBox="1"/>
+          <p:nvPr/>
+        </p:nvSpPr>
+        <p:spPr>
+          <a:xfrm>
+            <a:off x="548640" y="1234440"/>
+            <a:ext cx="11064240" cy="4937760"/>
+          </a:xfrm>
+          <a:prstGeom prst="rect">
+            <a:avLst/>
+          </a:prstGeom>
+          <a:noFill/>
+        </p:spPr>
+        <p:txBody>
+          <a:bodyPr wrap="square">
+            <a:noAutofit/>
+          </a:bodyPr>
+          <a:lstStyle/>
           <a:p>
             <a:pPr>
               <a:lnSpc>
@@ -5063,7 +5689,7 @@
               </a:defRPr>
             </a:pPr>
             <a:r>
-              <a:t>• Complete module8/CHECKLIST.md</a:t>
+              <a:t>• Module 7 inline monitor → Module 8 I2cMonitor for</a:t>
             </a:r>
           </a:p>
           <a:p>
@@ -5082,9 +5708,128 @@
               </a:defRPr>
             </a:pPr>
             <a:r>
-              <a:t>• Run ./scripts/module8.sh --check</a:t>
-            </a:r>
-          </a:p>
+              <a:t>      scalable tests.</a:t>
+            </a:r>
+          </a:p>
+        </p:txBody>
+      </p:sp>
+      <p:sp>
+        <p:nvSpPr>
+          <p:cNvPr id="4" name="TextBox 3"/>
+          <p:cNvSpPr txBox="1"/>
+          <p:nvPr/>
+        </p:nvSpPr>
+        <p:spPr>
+          <a:xfrm>
+            <a:off x="548640" y="6355080"/>
+            <a:ext cx="11064240" cy="320040"/>
+          </a:xfrm>
+          <a:prstGeom prst="rect">
+            <a:avLst/>
+          </a:prstGeom>
+          <a:noFill/>
+        </p:spPr>
+        <p:txBody>
+          <a:bodyPr wrap="square">
+            <a:noAutofit/>
+          </a:bodyPr>
+          <a:lstStyle/>
+          <a:p>
+            <a:pPr algn="r">
+              <a:lnSpc>
+                <a:spcPts val="2200"/>
+              </a:lnSpc>
+              <a:defRPr sz="1000" b="0">
+                <a:solidFill>
+                  <a:srgbClr val="666666"/>
+                </a:solidFill>
+                <a:latin typeface="Calibri"/>
+              </a:defRPr>
+            </a:pPr>
+            <a:r>
+              <a:t>learn_uart_spi_i2c / Module 8</a:t>
+            </a:r>
+          </a:p>
+        </p:txBody>
+      </p:sp>
+    </p:spTree>
+  </p:cSld>
+  <p:clrMapOvr>
+    <a:masterClrMapping/>
+  </p:clrMapOvr>
+</p:sld>
+</file>
+
+<file path=ppt/slides/slide18.xml><?xml version="1.0" encoding="utf-8"?>
+<p:sld xmlns:a="http://schemas.openxmlformats.org/drawingml/2006/main" xmlns:p="http://schemas.openxmlformats.org/presentationml/2006/main" xmlns:r="http://schemas.openxmlformats.org/officeDocument/2006/relationships">
+  <p:cSld>
+    <p:spTree>
+      <p:nvGrpSpPr>
+        <p:cNvPr id="1" name=""/>
+        <p:cNvGrpSpPr/>
+        <p:nvPr/>
+      </p:nvGrpSpPr>
+      <p:grpSpPr/>
+      <p:sp>
+        <p:nvSpPr>
+          <p:cNvPr id="2" name="TextBox 1"/>
+          <p:cNvSpPr txBox="1"/>
+          <p:nvPr/>
+        </p:nvSpPr>
+        <p:spPr>
+          <a:xfrm>
+            <a:off x="548640" y="411480"/>
+            <a:ext cx="11064240" cy="777240"/>
+          </a:xfrm>
+          <a:prstGeom prst="rect">
+            <a:avLst/>
+          </a:prstGeom>
+          <a:noFill/>
+        </p:spPr>
+        <p:txBody>
+          <a:bodyPr wrap="square">
+            <a:noAutofit/>
+          </a:bodyPr>
+          <a:lstStyle/>
+          <a:p>
+            <a:pPr>
+              <a:lnSpc>
+                <a:spcPts val="2200"/>
+              </a:lnSpc>
+              <a:defRPr sz="2800" b="1">
+                <a:solidFill>
+                  <a:srgbClr val="1A1A2E"/>
+                </a:solidFill>
+                <a:latin typeface="Calibri"/>
+              </a:defRPr>
+            </a:pPr>
+            <a:r>
+              <a:t>3. Extensions</a:t>
+            </a:r>
+          </a:p>
+        </p:txBody>
+      </p:sp>
+      <p:sp>
+        <p:nvSpPr>
+          <p:cNvPr id="3" name="TextBox 2"/>
+          <p:cNvSpPr txBox="1"/>
+          <p:nvPr/>
+        </p:nvSpPr>
+        <p:spPr>
+          <a:xfrm>
+            <a:off x="548640" y="1234440"/>
+            <a:ext cx="11064240" cy="4937760"/>
+          </a:xfrm>
+          <a:prstGeom prst="rect">
+            <a:avLst/>
+          </a:prstGeom>
+          <a:noFill/>
+        </p:spPr>
+        <p:txBody>
+          <a:bodyPr wrap="square">
+            <a:noAutofit/>
+          </a:bodyPr>
+          <a:lstStyle/>
           <a:p>
             <a:pPr>
               <a:lnSpc>
@@ -5101,7 +5846,26 @@
               </a:defRPr>
             </a:pPr>
             <a:r>
-              <a:t>• Next: Next module in course</a:t>
+              <a:t>• ACK/NACK, reads, multi-master — [LEARNING_GUIDE §</a:t>
+            </a:r>
+          </a:p>
+          <a:p>
+            <a:pPr>
+              <a:lnSpc>
+                <a:spcPts val="2200"/>
+              </a:lnSpc>
+              <a:spcAft>
+                <a:spcPts val="1000"/>
+              </a:spcAft>
+              <a:defRPr sz="2000" b="0">
+                <a:solidFill>
+                  <a:srgbClr val="333333"/>
+                </a:solidFill>
+                <a:latin typeface="Calibri"/>
+              </a:defRPr>
+            </a:pPr>
+            <a:r>
+              <a:t>      8](LEARNING_GUIDE_PROTOCOLS_AND_UVM.md#8-i2c-uvm-…</a:t>
             </a:r>
           </a:p>
         </p:txBody>
@@ -5109,6 +5873,102 @@
       <p:sp>
         <p:nvSpPr>
           <p:cNvPr id="4" name="TextBox 3"/>
+          <p:cNvSpPr txBox="1"/>
+          <p:nvPr/>
+        </p:nvSpPr>
+        <p:spPr>
+          <a:xfrm>
+            <a:off x="548640" y="6355080"/>
+            <a:ext cx="11064240" cy="320040"/>
+          </a:xfrm>
+          <a:prstGeom prst="rect">
+            <a:avLst/>
+          </a:prstGeom>
+          <a:noFill/>
+        </p:spPr>
+        <p:txBody>
+          <a:bodyPr wrap="square">
+            <a:noAutofit/>
+          </a:bodyPr>
+          <a:lstStyle/>
+          <a:p>
+            <a:pPr algn="r">
+              <a:lnSpc>
+                <a:spcPts val="2200"/>
+              </a:lnSpc>
+              <a:defRPr sz="1000" b="0">
+                <a:solidFill>
+                  <a:srgbClr val="666666"/>
+                </a:solidFill>
+                <a:latin typeface="Calibri"/>
+              </a:defRPr>
+            </a:pPr>
+            <a:r>
+              <a:t>learn_uart_spi_i2c / Module 8</a:t>
+            </a:r>
+          </a:p>
+        </p:txBody>
+      </p:sp>
+    </p:spTree>
+  </p:cSld>
+  <p:clrMapOvr>
+    <a:masterClrMapping/>
+  </p:clrMapOvr>
+</p:sld>
+</file>
+
+<file path=ppt/slides/slide19.xml><?xml version="1.0" encoding="utf-8"?>
+<p:sld xmlns:a="http://schemas.openxmlformats.org/drawingml/2006/main" xmlns:p="http://schemas.openxmlformats.org/presentationml/2006/main" xmlns:r="http://schemas.openxmlformats.org/officeDocument/2006/relationships">
+  <p:cSld>
+    <p:spTree>
+      <p:nvGrpSpPr>
+        <p:cNvPr id="1" name=""/>
+        <p:cNvGrpSpPr/>
+        <p:nvPr/>
+      </p:nvGrpSpPr>
+      <p:grpSpPr/>
+      <p:sp>
+        <p:nvSpPr>
+          <p:cNvPr id="2" name="TextBox 1"/>
+          <p:cNvSpPr txBox="1"/>
+          <p:nvPr/>
+        </p:nvSpPr>
+        <p:spPr>
+          <a:xfrm>
+            <a:off x="548640" y="2743200"/>
+            <a:ext cx="11064240" cy="1371600"/>
+          </a:xfrm>
+          <a:prstGeom prst="rect">
+            <a:avLst/>
+          </a:prstGeom>
+          <a:noFill/>
+        </p:spPr>
+        <p:txBody>
+          <a:bodyPr wrap="square">
+            <a:noAutofit/>
+          </a:bodyPr>
+          <a:lstStyle/>
+          <a:p>
+            <a:pPr algn="ctr">
+              <a:lnSpc>
+                <a:spcPts val="2200"/>
+              </a:lnSpc>
+              <a:defRPr sz="3600" b="1">
+                <a:solidFill>
+                  <a:srgbClr val="1A1A2E"/>
+                </a:solidFill>
+                <a:latin typeface="Calibri"/>
+              </a:defRPr>
+            </a:pPr>
+            <a:r>
+              <a:t>Syllabus topics</a:t>
+            </a:r>
+          </a:p>
+        </p:txBody>
+      </p:sp>
+      <p:sp>
+        <p:nvSpPr>
+          <p:cNvPr id="3" name="TextBox 2"/>
           <p:cNvSpPr txBox="1"/>
           <p:nvPr/>
         </p:nvSpPr>
@@ -5386,6 +6246,1696 @@
 </p:sld>
 </file>
 
+<file path=ppt/slides/slide20.xml><?xml version="1.0" encoding="utf-8"?>
+<p:sld xmlns:a="http://schemas.openxmlformats.org/drawingml/2006/main" xmlns:p="http://schemas.openxmlformats.org/presentationml/2006/main" xmlns:r="http://schemas.openxmlformats.org/officeDocument/2006/relationships">
+  <p:cSld>
+    <p:spTree>
+      <p:nvGrpSpPr>
+        <p:cNvPr id="1" name=""/>
+        <p:cNvGrpSpPr/>
+        <p:nvPr/>
+      </p:nvGrpSpPr>
+      <p:grpSpPr/>
+      <p:sp>
+        <p:nvSpPr>
+          <p:cNvPr id="2" name="TextBox 1"/>
+          <p:cNvSpPr txBox="1"/>
+          <p:nvPr/>
+        </p:nvSpPr>
+        <p:spPr>
+          <a:xfrm>
+            <a:off x="548640" y="411480"/>
+            <a:ext cx="11064240" cy="777240"/>
+          </a:xfrm>
+          <a:prstGeom prst="rect">
+            <a:avLst/>
+          </a:prstGeom>
+          <a:noFill/>
+        </p:spPr>
+        <p:txBody>
+          <a:bodyPr wrap="square">
+            <a:noAutofit/>
+          </a:bodyPr>
+          <a:lstStyle/>
+          <a:p>
+            <a:pPr>
+              <a:lnSpc>
+                <a:spcPts val="2200"/>
+              </a:lnSpc>
+              <a:defRPr sz="2800" b="1">
+                <a:solidFill>
+                  <a:srgbClr val="1A1A2E"/>
+                </a:solidFill>
+                <a:latin typeface="Calibri"/>
+              </a:defRPr>
+            </a:pPr>
+            <a:r>
+              <a:t>1. I²C protocol recap</a:t>
+            </a:r>
+          </a:p>
+        </p:txBody>
+      </p:sp>
+      <p:sp>
+        <p:nvSpPr>
+          <p:cNvPr id="3" name="TextBox 2"/>
+          <p:cNvSpPr txBox="1"/>
+          <p:nvPr/>
+        </p:nvSpPr>
+        <p:spPr>
+          <a:xfrm>
+            <a:off x="548640" y="1234440"/>
+            <a:ext cx="11064240" cy="4937760"/>
+          </a:xfrm>
+          <a:prstGeom prst="rect">
+            <a:avLst/>
+          </a:prstGeom>
+          <a:noFill/>
+        </p:spPr>
+        <p:txBody>
+          <a:bodyPr wrap="square">
+            <a:noAutofit/>
+          </a:bodyPr>
+          <a:lstStyle/>
+          <a:p>
+            <a:pPr>
+              <a:lnSpc>
+                <a:spcPts val="2200"/>
+              </a:lnSpc>
+              <a:spcAft>
+                <a:spcPts val="1000"/>
+              </a:spcAft>
+              <a:defRPr sz="2000" b="0">
+                <a:solidFill>
+                  <a:srgbClr val="333333"/>
+                </a:solidFill>
+                <a:latin typeface="Calibri"/>
+              </a:defRPr>
+            </a:pPr>
+            <a:r>
+              <a:t>• START/STOP on SCL high; MSB-first address and data</a:t>
+            </a:r>
+          </a:p>
+          <a:p>
+            <a:pPr>
+              <a:lnSpc>
+                <a:spcPts val="2200"/>
+              </a:lnSpc>
+              <a:spcAft>
+                <a:spcPts val="1000"/>
+              </a:spcAft>
+              <a:defRPr sz="2000" b="0">
+                <a:solidFill>
+                  <a:srgbClr val="333333"/>
+                </a:solidFill>
+                <a:latin typeface="Calibri"/>
+              </a:defRPr>
+            </a:pPr>
+            <a:r>
+              <a:t>      on SDA.</a:t>
+            </a:r>
+          </a:p>
+        </p:txBody>
+      </p:sp>
+      <p:sp>
+        <p:nvSpPr>
+          <p:cNvPr id="4" name="TextBox 3"/>
+          <p:cNvSpPr txBox="1"/>
+          <p:nvPr/>
+        </p:nvSpPr>
+        <p:spPr>
+          <a:xfrm>
+            <a:off x="548640" y="6355080"/>
+            <a:ext cx="11064240" cy="320040"/>
+          </a:xfrm>
+          <a:prstGeom prst="rect">
+            <a:avLst/>
+          </a:prstGeom>
+          <a:noFill/>
+        </p:spPr>
+        <p:txBody>
+          <a:bodyPr wrap="square">
+            <a:noAutofit/>
+          </a:bodyPr>
+          <a:lstStyle/>
+          <a:p>
+            <a:pPr algn="r">
+              <a:lnSpc>
+                <a:spcPts val="2200"/>
+              </a:lnSpc>
+              <a:defRPr sz="1000" b="0">
+                <a:solidFill>
+                  <a:srgbClr val="666666"/>
+                </a:solidFill>
+                <a:latin typeface="Calibri"/>
+              </a:defRPr>
+            </a:pPr>
+            <a:r>
+              <a:t>learn_uart_spi_i2c / Module 8</a:t>
+            </a:r>
+          </a:p>
+        </p:txBody>
+      </p:sp>
+    </p:spTree>
+  </p:cSld>
+  <p:clrMapOvr>
+    <a:masterClrMapping/>
+  </p:clrMapOvr>
+</p:sld>
+</file>
+
+<file path=ppt/slides/slide21.xml><?xml version="1.0" encoding="utf-8"?>
+<p:sld xmlns:a="http://schemas.openxmlformats.org/drawingml/2006/main" xmlns:p="http://schemas.openxmlformats.org/presentationml/2006/main" xmlns:r="http://schemas.openxmlformats.org/officeDocument/2006/relationships">
+  <p:cSld>
+    <p:spTree>
+      <p:nvGrpSpPr>
+        <p:cNvPr id="1" name=""/>
+        <p:cNvGrpSpPr/>
+        <p:nvPr/>
+      </p:nvGrpSpPr>
+      <p:grpSpPr/>
+      <p:sp>
+        <p:nvSpPr>
+          <p:cNvPr id="2" name="TextBox 1"/>
+          <p:cNvSpPr txBox="1"/>
+          <p:nvPr/>
+        </p:nvSpPr>
+        <p:spPr>
+          <a:xfrm>
+            <a:off x="548640" y="411480"/>
+            <a:ext cx="11064240" cy="777240"/>
+          </a:xfrm>
+          <a:prstGeom prst="rect">
+            <a:avLst/>
+          </a:prstGeom>
+          <a:noFill/>
+        </p:spPr>
+        <p:txBody>
+          <a:bodyPr wrap="square">
+            <a:noAutofit/>
+          </a:bodyPr>
+          <a:lstStyle/>
+          <a:p>
+            <a:pPr>
+              <a:lnSpc>
+                <a:spcPts val="2200"/>
+              </a:lnSpc>
+              <a:defRPr sz="2800" b="1">
+                <a:solidFill>
+                  <a:srgbClr val="1A1A2E"/>
+                </a:solidFill>
+                <a:latin typeface="Calibri"/>
+              </a:defRPr>
+            </a:pPr>
+            <a:r>
+              <a:t>2. Toolchain</a:t>
+            </a:r>
+          </a:p>
+        </p:txBody>
+      </p:sp>
+      <p:sp>
+        <p:nvSpPr>
+          <p:cNvPr id="3" name="TextBox 2"/>
+          <p:cNvSpPr txBox="1"/>
+          <p:nvPr/>
+        </p:nvSpPr>
+        <p:spPr>
+          <a:xfrm>
+            <a:off x="548640" y="1234440"/>
+            <a:ext cx="11064240" cy="4937760"/>
+          </a:xfrm>
+          <a:prstGeom prst="rect">
+            <a:avLst/>
+          </a:prstGeom>
+          <a:noFill/>
+        </p:spPr>
+        <p:txBody>
+          <a:bodyPr wrap="square">
+            <a:noAutofit/>
+          </a:bodyPr>
+          <a:lstStyle/>
+          <a:p>
+            <a:pPr>
+              <a:lnSpc>
+                <a:spcPts val="2200"/>
+              </a:lnSpc>
+              <a:spcAft>
+                <a:spcPts val="1000"/>
+              </a:spcAft>
+              <a:defRPr sz="2000" b="0">
+                <a:solidFill>
+                  <a:srgbClr val="333333"/>
+                </a:solidFill>
+                <a:latin typeface="Calibri"/>
+              </a:defRPr>
+            </a:pPr>
+            <a:r>
+              <a:t>• `make SIM=verilator TEST=test_i2c_uvm`;</a:t>
+            </a:r>
+          </a:p>
+          <a:p>
+            <a:pPr>
+              <a:lnSpc>
+                <a:spcPts val="2200"/>
+              </a:lnSpc>
+              <a:spcAft>
+                <a:spcPts val="1000"/>
+              </a:spcAft>
+              <a:defRPr sz="2000" b="0">
+                <a:solidFill>
+                  <a:srgbClr val="333333"/>
+                </a:solidFill>
+                <a:latin typeface="Calibri"/>
+              </a:defRPr>
+            </a:pPr>
+            <a:r>
+              <a:t>      `+UVM_TESTNAME=test_i2c_uvm`.</a:t>
+            </a:r>
+          </a:p>
+        </p:txBody>
+      </p:sp>
+      <p:sp>
+        <p:nvSpPr>
+          <p:cNvPr id="4" name="TextBox 3"/>
+          <p:cNvSpPr txBox="1"/>
+          <p:nvPr/>
+        </p:nvSpPr>
+        <p:spPr>
+          <a:xfrm>
+            <a:off x="548640" y="6355080"/>
+            <a:ext cx="11064240" cy="320040"/>
+          </a:xfrm>
+          <a:prstGeom prst="rect">
+            <a:avLst/>
+          </a:prstGeom>
+          <a:noFill/>
+        </p:spPr>
+        <p:txBody>
+          <a:bodyPr wrap="square">
+            <a:noAutofit/>
+          </a:bodyPr>
+          <a:lstStyle/>
+          <a:p>
+            <a:pPr algn="r">
+              <a:lnSpc>
+                <a:spcPts val="2200"/>
+              </a:lnSpc>
+              <a:defRPr sz="1000" b="0">
+                <a:solidFill>
+                  <a:srgbClr val="666666"/>
+                </a:solidFill>
+                <a:latin typeface="Calibri"/>
+              </a:defRPr>
+            </a:pPr>
+            <a:r>
+              <a:t>learn_uart_spi_i2c / Module 8</a:t>
+            </a:r>
+          </a:p>
+        </p:txBody>
+      </p:sp>
+    </p:spTree>
+  </p:cSld>
+  <p:clrMapOvr>
+    <a:masterClrMapping/>
+  </p:clrMapOvr>
+</p:sld>
+</file>
+
+<file path=ppt/slides/slide22.xml><?xml version="1.0" encoding="utf-8"?>
+<p:sld xmlns:a="http://schemas.openxmlformats.org/drawingml/2006/main" xmlns:p="http://schemas.openxmlformats.org/presentationml/2006/main" xmlns:r="http://schemas.openxmlformats.org/officeDocument/2006/relationships">
+  <p:cSld>
+    <p:spTree>
+      <p:nvGrpSpPr>
+        <p:cNvPr id="1" name=""/>
+        <p:cNvGrpSpPr/>
+        <p:nvPr/>
+      </p:nvGrpSpPr>
+      <p:grpSpPr/>
+      <p:sp>
+        <p:nvSpPr>
+          <p:cNvPr id="2" name="TextBox 1"/>
+          <p:cNvSpPr txBox="1"/>
+          <p:nvPr/>
+        </p:nvSpPr>
+        <p:spPr>
+          <a:xfrm>
+            <a:off x="548640" y="2743200"/>
+            <a:ext cx="11064240" cy="1371600"/>
+          </a:xfrm>
+          <a:prstGeom prst="rect">
+            <a:avLst/>
+          </a:prstGeom>
+          <a:noFill/>
+        </p:spPr>
+        <p:txBody>
+          <a:bodyPr wrap="square">
+            <a:noAutofit/>
+          </a:bodyPr>
+          <a:lstStyle/>
+          <a:p>
+            <a:pPr algn="ctr">
+              <a:lnSpc>
+                <a:spcPts val="2200"/>
+              </a:lnSpc>
+              <a:defRPr sz="3600" b="1">
+                <a:solidFill>
+                  <a:srgbClr val="1A1A2E"/>
+                </a:solidFill>
+                <a:latin typeface="Calibri"/>
+              </a:defRPr>
+            </a:pPr>
+            <a:r>
+              <a:t>Hands-on examples</a:t>
+            </a:r>
+          </a:p>
+        </p:txBody>
+      </p:sp>
+      <p:sp>
+        <p:nvSpPr>
+          <p:cNvPr id="3" name="TextBox 2"/>
+          <p:cNvSpPr txBox="1"/>
+          <p:nvPr/>
+        </p:nvSpPr>
+        <p:spPr>
+          <a:xfrm>
+            <a:off x="548640" y="6355080"/>
+            <a:ext cx="11064240" cy="320040"/>
+          </a:xfrm>
+          <a:prstGeom prst="rect">
+            <a:avLst/>
+          </a:prstGeom>
+          <a:noFill/>
+        </p:spPr>
+        <p:txBody>
+          <a:bodyPr wrap="square">
+            <a:noAutofit/>
+          </a:bodyPr>
+          <a:lstStyle/>
+          <a:p>
+            <a:pPr algn="r">
+              <a:lnSpc>
+                <a:spcPts val="2200"/>
+              </a:lnSpc>
+              <a:defRPr sz="1000" b="0">
+                <a:solidFill>
+                  <a:srgbClr val="666666"/>
+                </a:solidFill>
+                <a:latin typeface="Calibri"/>
+              </a:defRPr>
+            </a:pPr>
+            <a:r>
+              <a:t>learn_uart_spi_i2c / Module 8</a:t>
+            </a:r>
+          </a:p>
+        </p:txBody>
+      </p:sp>
+    </p:spTree>
+  </p:cSld>
+  <p:clrMapOvr>
+    <a:masterClrMapping/>
+  </p:clrMapOvr>
+</p:sld>
+</file>
+
+<file path=ppt/slides/slide23.xml><?xml version="1.0" encoding="utf-8"?>
+<p:sld xmlns:a="http://schemas.openxmlformats.org/drawingml/2006/main" xmlns:p="http://schemas.openxmlformats.org/presentationml/2006/main" xmlns:r="http://schemas.openxmlformats.org/officeDocument/2006/relationships">
+  <p:cSld>
+    <p:spTree>
+      <p:nvGrpSpPr>
+        <p:cNvPr id="1" name=""/>
+        <p:cNvGrpSpPr/>
+        <p:nvPr/>
+      </p:nvGrpSpPr>
+      <p:grpSpPr/>
+      <p:sp>
+        <p:nvSpPr>
+          <p:cNvPr id="2" name="TextBox 1"/>
+          <p:cNvSpPr txBox="1"/>
+          <p:nvPr/>
+        </p:nvSpPr>
+        <p:spPr>
+          <a:xfrm>
+            <a:off x="548640" y="411480"/>
+            <a:ext cx="11064240" cy="777240"/>
+          </a:xfrm>
+          <a:prstGeom prst="rect">
+            <a:avLst/>
+          </a:prstGeom>
+          <a:noFill/>
+        </p:spPr>
+        <p:txBody>
+          <a:bodyPr wrap="square">
+            <a:noAutofit/>
+          </a:bodyPr>
+          <a:lstStyle/>
+          <a:p>
+            <a:pPr>
+              <a:lnSpc>
+                <a:spcPts val="2200"/>
+              </a:lnSpc>
+              <a:defRPr sz="2800" b="1">
+                <a:solidFill>
+                  <a:srgbClr val="1A1A2E"/>
+                </a:solidFill>
+                <a:latin typeface="Calibri"/>
+              </a:defRPr>
+            </a:pPr>
+            <a:r>
+              <a:t>Module 8 self-check</a:t>
+            </a:r>
+          </a:p>
+        </p:txBody>
+      </p:sp>
+      <p:sp>
+        <p:nvSpPr>
+          <p:cNvPr id="3" name="TextBox 2"/>
+          <p:cNvSpPr txBox="1"/>
+          <p:nvPr/>
+        </p:nvSpPr>
+        <p:spPr>
+          <a:xfrm>
+            <a:off x="548640" y="1051560"/>
+            <a:ext cx="11064240" cy="914400"/>
+          </a:xfrm>
+          <a:prstGeom prst="rect">
+            <a:avLst/>
+          </a:prstGeom>
+          <a:solidFill>
+            <a:srgbClr val="F4F4F4"/>
+          </a:solidFill>
+        </p:spPr>
+        <p:txBody>
+          <a:bodyPr wrap="square">
+            <a:noAutofit/>
+          </a:bodyPr>
+          <a:lstStyle/>
+          <a:p>
+            <a:pPr>
+              <a:lnSpc>
+                <a:spcPts val="2200"/>
+              </a:lnSpc>
+              <a:spcAft>
+                <a:spcPts val="200"/>
+              </a:spcAft>
+              <a:defRPr sz="2000" b="0">
+                <a:solidFill>
+                  <a:srgbClr val="333333"/>
+                </a:solidFill>
+                <a:latin typeface="Consolas"/>
+              </a:defRPr>
+            </a:pPr>
+            <a:r>
+              <a:t>$ ./scripts/module8.sh --help</a:t>
+            </a:r>
+          </a:p>
+        </p:txBody>
+      </p:sp>
+      <p:pic>
+        <p:nvPicPr>
+          <p:cNvPr id="4" name="Picture 3" descr="module8_check.png"/>
+          <p:cNvPicPr>
+            <a:picLocks noChangeAspect="1"/>
+          </p:cNvPicPr>
+          <p:nvPr/>
+        </p:nvPicPr>
+        <p:blipFill>
+          <a:blip r:embed="rId2"/>
+          <a:stretch>
+            <a:fillRect/>
+          </a:stretch>
+        </p:blipFill>
+        <p:spPr>
+          <a:xfrm>
+            <a:off x="548640" y="1965960"/>
+            <a:ext cx="7071358" cy="3977639"/>
+          </a:xfrm>
+          <a:prstGeom prst="rect">
+            <a:avLst/>
+          </a:prstGeom>
+        </p:spPr>
+      </p:pic>
+      <p:sp>
+        <p:nvSpPr>
+          <p:cNvPr id="5" name="TextBox 4"/>
+          <p:cNvSpPr txBox="1"/>
+          <p:nvPr/>
+        </p:nvSpPr>
+        <p:spPr>
+          <a:xfrm>
+            <a:off x="548640" y="6355080"/>
+            <a:ext cx="11064240" cy="320040"/>
+          </a:xfrm>
+          <a:prstGeom prst="rect">
+            <a:avLst/>
+          </a:prstGeom>
+          <a:noFill/>
+        </p:spPr>
+        <p:txBody>
+          <a:bodyPr wrap="square">
+            <a:noAutofit/>
+          </a:bodyPr>
+          <a:lstStyle/>
+          <a:p>
+            <a:pPr algn="r">
+              <a:lnSpc>
+                <a:spcPts val="2200"/>
+              </a:lnSpc>
+              <a:defRPr sz="1000" b="0">
+                <a:solidFill>
+                  <a:srgbClr val="666666"/>
+                </a:solidFill>
+                <a:latin typeface="Calibri"/>
+              </a:defRPr>
+            </a:pPr>
+            <a:r>
+              <a:t>learn_uart_spi_i2c / Module 8</a:t>
+            </a:r>
+          </a:p>
+        </p:txBody>
+      </p:sp>
+    </p:spTree>
+  </p:cSld>
+  <p:clrMapOvr>
+    <a:masterClrMapping/>
+  </p:clrMapOvr>
+</p:sld>
+</file>
+
+<file path=ppt/slides/slide24.xml><?xml version="1.0" encoding="utf-8"?>
+<p:sld xmlns:a="http://schemas.openxmlformats.org/drawingml/2006/main" xmlns:p="http://schemas.openxmlformats.org/presentationml/2006/main" xmlns:r="http://schemas.openxmlformats.org/officeDocument/2006/relationships">
+  <p:cSld>
+    <p:spTree>
+      <p:nvGrpSpPr>
+        <p:cNvPr id="1" name=""/>
+        <p:cNvGrpSpPr/>
+        <p:nvPr/>
+      </p:nvGrpSpPr>
+      <p:grpSpPr/>
+      <p:sp>
+        <p:nvSpPr>
+          <p:cNvPr id="2" name="TextBox 1"/>
+          <p:cNvSpPr txBox="1"/>
+          <p:nvPr/>
+        </p:nvSpPr>
+        <p:spPr>
+          <a:xfrm>
+            <a:off x="548640" y="411480"/>
+            <a:ext cx="11064240" cy="777240"/>
+          </a:xfrm>
+          <a:prstGeom prst="rect">
+            <a:avLst/>
+          </a:prstGeom>
+          <a:noFill/>
+        </p:spPr>
+        <p:txBody>
+          <a:bodyPr wrap="square">
+            <a:noAutofit/>
+          </a:bodyPr>
+          <a:lstStyle/>
+          <a:p>
+            <a:pPr>
+              <a:lnSpc>
+                <a:spcPts val="2200"/>
+              </a:lnSpc>
+              <a:defRPr sz="2800" b="1">
+                <a:solidFill>
+                  <a:srgbClr val="1A1A2E"/>
+                </a:solidFill>
+                <a:latin typeface="Calibri"/>
+              </a:defRPr>
+            </a:pPr>
+            <a:r>
+              <a:t>Example 1: I²C UVM</a:t>
+            </a:r>
+          </a:p>
+        </p:txBody>
+      </p:sp>
+      <p:sp>
+        <p:nvSpPr>
+          <p:cNvPr id="3" name="TextBox 2"/>
+          <p:cNvSpPr txBox="1"/>
+          <p:nvPr/>
+        </p:nvSpPr>
+        <p:spPr>
+          <a:xfrm>
+            <a:off x="548640" y="1234440"/>
+            <a:ext cx="11064240" cy="4937760"/>
+          </a:xfrm>
+          <a:prstGeom prst="rect">
+            <a:avLst/>
+          </a:prstGeom>
+          <a:noFill/>
+        </p:spPr>
+        <p:txBody>
+          <a:bodyPr wrap="square">
+            <a:noAutofit/>
+          </a:bodyPr>
+          <a:lstStyle/>
+          <a:p>
+            <a:pPr>
+              <a:lnSpc>
+                <a:spcPts val="2200"/>
+              </a:lnSpc>
+              <a:spcAft>
+                <a:spcPts val="1000"/>
+              </a:spcAft>
+              <a:defRPr sz="2000" b="0">
+                <a:solidFill>
+                  <a:srgbClr val="333333"/>
+                </a:solidFill>
+                <a:latin typeface="Calibri"/>
+              </a:defRPr>
+            </a:pPr>
+            <a:r>
+              <a:t>• UVM phases and reporting (DRIVER, MONITOR,</a:t>
+            </a:r>
+          </a:p>
+          <a:p>
+            <a:pPr>
+              <a:lnSpc>
+                <a:spcPts val="2200"/>
+              </a:lnSpc>
+              <a:spcAft>
+                <a:spcPts val="1000"/>
+              </a:spcAft>
+              <a:defRPr sz="2000" b="0">
+                <a:solidFill>
+                  <a:srgbClr val="333333"/>
+                </a:solidFill>
+                <a:latin typeface="Calibri"/>
+              </a:defRPr>
+            </a:pPr>
+            <a:r>
+              <a:t>      SCOREBOARD).</a:t>
+            </a:r>
+          </a:p>
+          <a:p>
+            <a:pPr>
+              <a:lnSpc>
+                <a:spcPts val="2200"/>
+              </a:lnSpc>
+              <a:spcAft>
+                <a:spcPts val="1000"/>
+              </a:spcAft>
+              <a:defRPr sz="2000" b="0">
+                <a:solidFill>
+                  <a:srgbClr val="333333"/>
+                </a:solidFill>
+                <a:latin typeface="Calibri"/>
+              </a:defRPr>
+            </a:pPr>
+            <a:r>
+              <a:t>• Scoreboard checks (expected vs observed address+data</a:t>
+            </a:r>
+          </a:p>
+          <a:p>
+            <a:pPr>
+              <a:lnSpc>
+                <a:spcPts val="2200"/>
+              </a:lnSpc>
+              <a:spcAft>
+                <a:spcPts val="1000"/>
+              </a:spcAft>
+              <a:defRPr sz="2000" b="0">
+                <a:solidFill>
+                  <a:srgbClr val="333333"/>
+                </a:solidFill>
+                <a:latin typeface="Calibri"/>
+              </a:defRPr>
+            </a:pPr>
+            <a:r>
+              <a:t>      from the bus).</a:t>
+            </a:r>
+          </a:p>
+          <a:p>
+            <a:pPr>
+              <a:lnSpc>
+                <a:spcPts val="2200"/>
+              </a:lnSpc>
+              <a:spcAft>
+                <a:spcPts val="1000"/>
+              </a:spcAft>
+              <a:defRPr sz="2000" b="0">
+                <a:solidFill>
+                  <a:srgbClr val="333333"/>
+                </a:solidFill>
+                <a:latin typeface="Calibri"/>
+              </a:defRPr>
+            </a:pPr>
+            <a:r>
+              <a:t>• Final scoreboard summary (matches and mismatches).</a:t>
+            </a:r>
+          </a:p>
+        </p:txBody>
+      </p:sp>
+      <p:sp>
+        <p:nvSpPr>
+          <p:cNvPr id="4" name="TextBox 3"/>
+          <p:cNvSpPr txBox="1"/>
+          <p:nvPr/>
+        </p:nvSpPr>
+        <p:spPr>
+          <a:xfrm>
+            <a:off x="548640" y="6355080"/>
+            <a:ext cx="11064240" cy="320040"/>
+          </a:xfrm>
+          <a:prstGeom prst="rect">
+            <a:avLst/>
+          </a:prstGeom>
+          <a:noFill/>
+        </p:spPr>
+        <p:txBody>
+          <a:bodyPr wrap="square">
+            <a:noAutofit/>
+          </a:bodyPr>
+          <a:lstStyle/>
+          <a:p>
+            <a:pPr algn="r">
+              <a:lnSpc>
+                <a:spcPts val="2200"/>
+              </a:lnSpc>
+              <a:defRPr sz="1000" b="0">
+                <a:solidFill>
+                  <a:srgbClr val="666666"/>
+                </a:solidFill>
+                <a:latin typeface="Calibri"/>
+              </a:defRPr>
+            </a:pPr>
+            <a:r>
+              <a:t>learn_uart_spi_i2c / Module 8</a:t>
+            </a:r>
+          </a:p>
+        </p:txBody>
+      </p:sp>
+    </p:spTree>
+  </p:cSld>
+  <p:clrMapOvr>
+    <a:masterClrMapping/>
+  </p:clrMapOvr>
+</p:sld>
+</file>
+
+<file path=ppt/slides/slide25.xml><?xml version="1.0" encoding="utf-8"?>
+<p:sld xmlns:a="http://schemas.openxmlformats.org/drawingml/2006/main" xmlns:p="http://schemas.openxmlformats.org/presentationml/2006/main" xmlns:r="http://schemas.openxmlformats.org/officeDocument/2006/relationships">
+  <p:cSld>
+    <p:spTree>
+      <p:nvGrpSpPr>
+        <p:cNvPr id="1" name=""/>
+        <p:cNvGrpSpPr/>
+        <p:nvPr/>
+      </p:nvGrpSpPr>
+      <p:grpSpPr/>
+      <p:sp>
+        <p:nvSpPr>
+          <p:cNvPr id="2" name="TextBox 1"/>
+          <p:cNvSpPr txBox="1"/>
+          <p:nvPr/>
+        </p:nvSpPr>
+        <p:spPr>
+          <a:xfrm>
+            <a:off x="548640" y="411480"/>
+            <a:ext cx="11064240" cy="777240"/>
+          </a:xfrm>
+          <a:prstGeom prst="rect">
+            <a:avLst/>
+          </a:prstGeom>
+          <a:noFill/>
+        </p:spPr>
+        <p:txBody>
+          <a:bodyPr wrap="square">
+            <a:noAutofit/>
+          </a:bodyPr>
+          <a:lstStyle/>
+          <a:p>
+            <a:pPr>
+              <a:lnSpc>
+                <a:spcPts val="2200"/>
+              </a:lnSpc>
+              <a:defRPr sz="2800" b="1">
+                <a:solidFill>
+                  <a:srgbClr val="1A1A2E"/>
+                </a:solidFill>
+                <a:latin typeface="Calibri"/>
+              </a:defRPr>
+            </a:pPr>
+            <a:r>
+              <a:t>Demo: I²C UVM</a:t>
+            </a:r>
+          </a:p>
+        </p:txBody>
+      </p:sp>
+      <p:sp>
+        <p:nvSpPr>
+          <p:cNvPr id="3" name="TextBox 2"/>
+          <p:cNvSpPr txBox="1"/>
+          <p:nvPr/>
+        </p:nvSpPr>
+        <p:spPr>
+          <a:xfrm>
+            <a:off x="548640" y="1051560"/>
+            <a:ext cx="11064240" cy="914400"/>
+          </a:xfrm>
+          <a:prstGeom prst="rect">
+            <a:avLst/>
+          </a:prstGeom>
+          <a:solidFill>
+            <a:srgbClr val="F4F4F4"/>
+          </a:solidFill>
+        </p:spPr>
+        <p:txBody>
+          <a:bodyPr wrap="square">
+            <a:noAutofit/>
+          </a:bodyPr>
+          <a:lstStyle/>
+          <a:p>
+            <a:pPr>
+              <a:lnSpc>
+                <a:spcPts val="2200"/>
+              </a:lnSpc>
+              <a:spcAft>
+                <a:spcPts val="200"/>
+              </a:spcAft>
+              <a:defRPr sz="2000" b="0">
+                <a:solidFill>
+                  <a:srgbClr val="333333"/>
+                </a:solidFill>
+                <a:latin typeface="Consolas"/>
+              </a:defRPr>
+            </a:pPr>
+            <a:r>
+              <a:t>$ ./scripts/module8.sh --run</a:t>
+            </a:r>
+          </a:p>
+        </p:txBody>
+      </p:sp>
+      <p:pic>
+        <p:nvPicPr>
+          <p:cNvPr id="4" name="Picture 3" descr="i2c_uvm.png"/>
+          <p:cNvPicPr>
+            <a:picLocks noChangeAspect="1"/>
+          </p:cNvPicPr>
+          <p:nvPr/>
+        </p:nvPicPr>
+        <p:blipFill>
+          <a:blip r:embed="rId2"/>
+          <a:stretch>
+            <a:fillRect/>
+          </a:stretch>
+        </p:blipFill>
+        <p:spPr>
+          <a:xfrm>
+            <a:off x="548640" y="1965960"/>
+            <a:ext cx="7071358" cy="3977639"/>
+          </a:xfrm>
+          <a:prstGeom prst="rect">
+            <a:avLst/>
+          </a:prstGeom>
+        </p:spPr>
+      </p:pic>
+      <p:sp>
+        <p:nvSpPr>
+          <p:cNvPr id="5" name="TextBox 4"/>
+          <p:cNvSpPr txBox="1"/>
+          <p:nvPr/>
+        </p:nvSpPr>
+        <p:spPr>
+          <a:xfrm>
+            <a:off x="548640" y="6355080"/>
+            <a:ext cx="11064240" cy="320040"/>
+          </a:xfrm>
+          <a:prstGeom prst="rect">
+            <a:avLst/>
+          </a:prstGeom>
+          <a:noFill/>
+        </p:spPr>
+        <p:txBody>
+          <a:bodyPr wrap="square">
+            <a:noAutofit/>
+          </a:bodyPr>
+          <a:lstStyle/>
+          <a:p>
+            <a:pPr algn="r">
+              <a:lnSpc>
+                <a:spcPts val="2200"/>
+              </a:lnSpc>
+              <a:defRPr sz="1000" b="0">
+                <a:solidFill>
+                  <a:srgbClr val="666666"/>
+                </a:solidFill>
+                <a:latin typeface="Calibri"/>
+              </a:defRPr>
+            </a:pPr>
+            <a:r>
+              <a:t>learn_uart_spi_i2c / Module 8</a:t>
+            </a:r>
+          </a:p>
+        </p:txBody>
+      </p:sp>
+    </p:spTree>
+  </p:cSld>
+  <p:clrMapOvr>
+    <a:masterClrMapping/>
+  </p:clrMapOvr>
+</p:sld>
+</file>
+
+<file path=ppt/slides/slide26.xml><?xml version="1.0" encoding="utf-8"?>
+<p:sld xmlns:a="http://schemas.openxmlformats.org/drawingml/2006/main" xmlns:p="http://schemas.openxmlformats.org/presentationml/2006/main" xmlns:r="http://schemas.openxmlformats.org/officeDocument/2006/relationships">
+  <p:cSld>
+    <p:spTree>
+      <p:nvGrpSpPr>
+        <p:cNvPr id="1" name=""/>
+        <p:cNvGrpSpPr/>
+        <p:nvPr/>
+      </p:nvGrpSpPr>
+      <p:grpSpPr/>
+      <p:sp>
+        <p:nvSpPr>
+          <p:cNvPr id="2" name="TextBox 1"/>
+          <p:cNvSpPr txBox="1"/>
+          <p:nvPr/>
+        </p:nvSpPr>
+        <p:spPr>
+          <a:xfrm>
+            <a:off x="548640" y="2743200"/>
+            <a:ext cx="11064240" cy="1371600"/>
+          </a:xfrm>
+          <a:prstGeom prst="rect">
+            <a:avLst/>
+          </a:prstGeom>
+          <a:noFill/>
+        </p:spPr>
+        <p:txBody>
+          <a:bodyPr wrap="square">
+            <a:noAutofit/>
+          </a:bodyPr>
+          <a:lstStyle/>
+          <a:p>
+            <a:pPr algn="ctr">
+              <a:lnSpc>
+                <a:spcPts val="2200"/>
+              </a:lnSpc>
+              <a:defRPr sz="3600" b="1">
+                <a:solidFill>
+                  <a:srgbClr val="1A1A2E"/>
+                </a:solidFill>
+                <a:latin typeface="Calibri"/>
+              </a:defRPr>
+            </a:pPr>
+            <a:r>
+              <a:t>Practice &amp; assessment</a:t>
+            </a:r>
+          </a:p>
+        </p:txBody>
+      </p:sp>
+      <p:sp>
+        <p:nvSpPr>
+          <p:cNvPr id="3" name="TextBox 2"/>
+          <p:cNvSpPr txBox="1"/>
+          <p:nvPr/>
+        </p:nvSpPr>
+        <p:spPr>
+          <a:xfrm>
+            <a:off x="548640" y="6355080"/>
+            <a:ext cx="11064240" cy="320040"/>
+          </a:xfrm>
+          <a:prstGeom prst="rect">
+            <a:avLst/>
+          </a:prstGeom>
+          <a:noFill/>
+        </p:spPr>
+        <p:txBody>
+          <a:bodyPr wrap="square">
+            <a:noAutofit/>
+          </a:bodyPr>
+          <a:lstStyle/>
+          <a:p>
+            <a:pPr algn="r">
+              <a:lnSpc>
+                <a:spcPts val="2200"/>
+              </a:lnSpc>
+              <a:defRPr sz="1000" b="0">
+                <a:solidFill>
+                  <a:srgbClr val="666666"/>
+                </a:solidFill>
+                <a:latin typeface="Calibri"/>
+              </a:defRPr>
+            </a:pPr>
+            <a:r>
+              <a:t>learn_uart_spi_i2c / Module 8</a:t>
+            </a:r>
+          </a:p>
+        </p:txBody>
+      </p:sp>
+    </p:spTree>
+  </p:cSld>
+  <p:clrMapOvr>
+    <a:masterClrMapping/>
+  </p:clrMapOvr>
+</p:sld>
+</file>
+
+<file path=ppt/slides/slide27.xml><?xml version="1.0" encoding="utf-8"?>
+<p:sld xmlns:a="http://schemas.openxmlformats.org/drawingml/2006/main" xmlns:p="http://schemas.openxmlformats.org/presentationml/2006/main" xmlns:r="http://schemas.openxmlformats.org/officeDocument/2006/relationships">
+  <p:cSld>
+    <p:spTree>
+      <p:nvGrpSpPr>
+        <p:cNvPr id="1" name=""/>
+        <p:cNvGrpSpPr/>
+        <p:nvPr/>
+      </p:nvGrpSpPr>
+      <p:grpSpPr/>
+      <p:sp>
+        <p:nvSpPr>
+          <p:cNvPr id="2" name="TextBox 1"/>
+          <p:cNvSpPr txBox="1"/>
+          <p:nvPr/>
+        </p:nvSpPr>
+        <p:spPr>
+          <a:xfrm>
+            <a:off x="548640" y="411480"/>
+            <a:ext cx="11064240" cy="777240"/>
+          </a:xfrm>
+          <a:prstGeom prst="rect">
+            <a:avLst/>
+          </a:prstGeom>
+          <a:noFill/>
+        </p:spPr>
+        <p:txBody>
+          <a:bodyPr wrap="square">
+            <a:noAutofit/>
+          </a:bodyPr>
+          <a:lstStyle/>
+          <a:p>
+            <a:pPr>
+              <a:lnSpc>
+                <a:spcPts val="2200"/>
+              </a:lnSpc>
+              <a:defRPr sz="2800" b="1">
+                <a:solidFill>
+                  <a:srgbClr val="1A1A2E"/>
+                </a:solidFill>
+                <a:latin typeface="Calibri"/>
+              </a:defRPr>
+            </a:pPr>
+            <a:r>
+              <a:t>What you should know</a:t>
+            </a:r>
+          </a:p>
+        </p:txBody>
+      </p:sp>
+      <p:sp>
+        <p:nvSpPr>
+          <p:cNvPr id="3" name="TextBox 2"/>
+          <p:cNvSpPr txBox="1"/>
+          <p:nvPr/>
+        </p:nvSpPr>
+        <p:spPr>
+          <a:xfrm>
+            <a:off x="548640" y="1234440"/>
+            <a:ext cx="11064240" cy="4937760"/>
+          </a:xfrm>
+          <a:prstGeom prst="rect">
+            <a:avLst/>
+          </a:prstGeom>
+          <a:noFill/>
+        </p:spPr>
+        <p:txBody>
+          <a:bodyPr wrap="square">
+            <a:noAutofit/>
+          </a:bodyPr>
+          <a:lstStyle/>
+          <a:p>
+            <a:pPr>
+              <a:lnSpc>
+                <a:spcPts val="2200"/>
+              </a:lnSpc>
+              <a:spcAft>
+                <a:spcPts val="1000"/>
+              </a:spcAft>
+              <a:defRPr sz="2000" b="0">
+                <a:solidFill>
+                  <a:srgbClr val="333333"/>
+                </a:solidFill>
+                <a:latin typeface="Calibri"/>
+              </a:defRPr>
+            </a:pPr>
+            <a:r>
+              <a:t>• Describe the I²C UVM agent and how I2cMonitor maps</a:t>
+            </a:r>
+          </a:p>
+          <a:p>
+            <a:pPr>
+              <a:lnSpc>
+                <a:spcPts val="2200"/>
+              </a:lnSpc>
+              <a:spcAft>
+                <a:spcPts val="1000"/>
+              </a:spcAft>
+              <a:defRPr sz="2000" b="0">
+                <a:solidFill>
+                  <a:srgbClr val="333333"/>
+                </a:solidFill>
+                <a:latin typeface="Calibri"/>
+              </a:defRPr>
+            </a:pPr>
+            <a:r>
+              <a:t>      to SCL/SDA behavior.</a:t>
+            </a:r>
+          </a:p>
+          <a:p>
+            <a:pPr>
+              <a:lnSpc>
+                <a:spcPts val="2200"/>
+              </a:lnSpc>
+              <a:spcAft>
+                <a:spcPts val="1000"/>
+              </a:spcAft>
+              <a:defRPr sz="2000" b="0">
+                <a:solidFill>
+                  <a:srgbClr val="333333"/>
+                </a:solidFill>
+                <a:latin typeface="Calibri"/>
+              </a:defRPr>
+            </a:pPr>
+            <a:r>
+              <a:t>• Explain two-phase scoreboard checking (address vs</a:t>
+            </a:r>
+          </a:p>
+          <a:p>
+            <a:pPr>
+              <a:lnSpc>
+                <a:spcPts val="2200"/>
+              </a:lnSpc>
+              <a:spcAft>
+                <a:spcPts val="1000"/>
+              </a:spcAft>
+              <a:defRPr sz="2000" b="0">
+                <a:solidFill>
+                  <a:srgbClr val="333333"/>
+                </a:solidFill>
+                <a:latin typeface="Calibri"/>
+              </a:defRPr>
+            </a:pPr>
+            <a:r>
+              <a:t>      data).</a:t>
+            </a:r>
+          </a:p>
+          <a:p>
+            <a:pPr>
+              <a:lnSpc>
+                <a:spcPts val="2200"/>
+              </a:lnSpc>
+              <a:spcAft>
+                <a:spcPts val="1000"/>
+              </a:spcAft>
+              <a:defRPr sz="2000" b="0">
+                <a:solidFill>
+                  <a:srgbClr val="333333"/>
+                </a:solidFill>
+                <a:latin typeface="Calibri"/>
+              </a:defRPr>
+            </a:pPr>
+            <a:r>
+              <a:t>• Run `i2c_uvm` and interpret UVM / scoreboard output.</a:t>
+            </a:r>
+          </a:p>
+          <a:p>
+            <a:pPr>
+              <a:lnSpc>
+                <a:spcPts val="2200"/>
+              </a:lnSpc>
+              <a:spcAft>
+                <a:spcPts val="1000"/>
+              </a:spcAft>
+              <a:defRPr sz="2000" b="0">
+                <a:solidFill>
+                  <a:srgbClr val="333333"/>
+                </a:solidFill>
+                <a:latin typeface="Calibri"/>
+              </a:defRPr>
+            </a:pPr>
+            <a:r>
+              <a:t>• Compare verification architecture across UART, SPI,</a:t>
+            </a:r>
+          </a:p>
+          <a:p>
+            <a:pPr>
+              <a:lnSpc>
+                <a:spcPts val="2200"/>
+              </a:lnSpc>
+              <a:spcAft>
+                <a:spcPts val="1000"/>
+              </a:spcAft>
+              <a:defRPr sz="2000" b="0">
+                <a:solidFill>
+                  <a:srgbClr val="333333"/>
+                </a:solidFill>
+                <a:latin typeface="Calibri"/>
+              </a:defRPr>
+            </a:pPr>
+            <a:r>
+              <a:t>      and I²C modules in this course.</a:t>
+            </a:r>
+          </a:p>
+        </p:txBody>
+      </p:sp>
+      <p:sp>
+        <p:nvSpPr>
+          <p:cNvPr id="4" name="TextBox 3"/>
+          <p:cNvSpPr txBox="1"/>
+          <p:nvPr/>
+        </p:nvSpPr>
+        <p:spPr>
+          <a:xfrm>
+            <a:off x="548640" y="6355080"/>
+            <a:ext cx="11064240" cy="320040"/>
+          </a:xfrm>
+          <a:prstGeom prst="rect">
+            <a:avLst/>
+          </a:prstGeom>
+          <a:noFill/>
+        </p:spPr>
+        <p:txBody>
+          <a:bodyPr wrap="square">
+            <a:noAutofit/>
+          </a:bodyPr>
+          <a:lstStyle/>
+          <a:p>
+            <a:pPr algn="r">
+              <a:lnSpc>
+                <a:spcPts val="2200"/>
+              </a:lnSpc>
+              <a:defRPr sz="1000" b="0">
+                <a:solidFill>
+                  <a:srgbClr val="666666"/>
+                </a:solidFill>
+                <a:latin typeface="Calibri"/>
+              </a:defRPr>
+            </a:pPr>
+            <a:r>
+              <a:t>learn_uart_spi_i2c / Module 8</a:t>
+            </a:r>
+          </a:p>
+        </p:txBody>
+      </p:sp>
+    </p:spTree>
+  </p:cSld>
+  <p:clrMapOvr>
+    <a:masterClrMapping/>
+  </p:clrMapOvr>
+</p:sld>
+</file>
+
+<file path=ppt/slides/slide28.xml><?xml version="1.0" encoding="utf-8"?>
+<p:sld xmlns:a="http://schemas.openxmlformats.org/drawingml/2006/main" xmlns:p="http://schemas.openxmlformats.org/presentationml/2006/main" xmlns:r="http://schemas.openxmlformats.org/officeDocument/2006/relationships">
+  <p:cSld>
+    <p:spTree>
+      <p:nvGrpSpPr>
+        <p:cNvPr id="1" name=""/>
+        <p:cNvGrpSpPr/>
+        <p:nvPr/>
+      </p:nvGrpSpPr>
+      <p:grpSpPr/>
+      <p:sp>
+        <p:nvSpPr>
+          <p:cNvPr id="2" name="TextBox 1"/>
+          <p:cNvSpPr txBox="1"/>
+          <p:nvPr/>
+        </p:nvSpPr>
+        <p:spPr>
+          <a:xfrm>
+            <a:off x="548640" y="411480"/>
+            <a:ext cx="11064240" cy="777240"/>
+          </a:xfrm>
+          <a:prstGeom prst="rect">
+            <a:avLst/>
+          </a:prstGeom>
+          <a:noFill/>
+        </p:spPr>
+        <p:txBody>
+          <a:bodyPr wrap="square">
+            <a:noAutofit/>
+          </a:bodyPr>
+          <a:lstStyle/>
+          <a:p>
+            <a:pPr>
+              <a:lnSpc>
+                <a:spcPts val="2200"/>
+              </a:lnSpc>
+              <a:defRPr sz="2800" b="1">
+                <a:solidFill>
+                  <a:srgbClr val="1A1A2E"/>
+                </a:solidFill>
+                <a:latin typeface="Calibri"/>
+              </a:defRPr>
+            </a:pPr>
+            <a:r>
+              <a:t>Exercises</a:t>
+            </a:r>
+          </a:p>
+        </p:txBody>
+      </p:sp>
+      <p:sp>
+        <p:nvSpPr>
+          <p:cNvPr id="3" name="TextBox 2"/>
+          <p:cNvSpPr txBox="1"/>
+          <p:nvPr/>
+        </p:nvSpPr>
+        <p:spPr>
+          <a:xfrm>
+            <a:off x="548640" y="1234440"/>
+            <a:ext cx="11064240" cy="4937760"/>
+          </a:xfrm>
+          <a:prstGeom prst="rect">
+            <a:avLst/>
+          </a:prstGeom>
+          <a:noFill/>
+        </p:spPr>
+        <p:txBody>
+          <a:bodyPr wrap="square">
+            <a:noAutofit/>
+          </a:bodyPr>
+          <a:lstStyle/>
+          <a:p>
+            <a:pPr>
+              <a:lnSpc>
+                <a:spcPts val="2200"/>
+              </a:lnSpc>
+              <a:spcAft>
+                <a:spcPts val="1000"/>
+              </a:spcAft>
+              <a:defRPr sz="2000" b="0">
+                <a:solidFill>
+                  <a:srgbClr val="333333"/>
+                </a:solidFill>
+                <a:latin typeface="Calibri"/>
+              </a:defRPr>
+            </a:pPr>
+            <a:r>
+              <a:t>• Run i2c_uvm</a:t>
+            </a:r>
+          </a:p>
+          <a:p>
+            <a:pPr>
+              <a:lnSpc>
+                <a:spcPts val="2200"/>
+              </a:lnSpc>
+              <a:spcAft>
+                <a:spcPts val="1000"/>
+              </a:spcAft>
+              <a:defRPr sz="2000" b="0">
+                <a:solidFill>
+                  <a:srgbClr val="333333"/>
+                </a:solidFill>
+                <a:latin typeface="Calibri"/>
+              </a:defRPr>
+            </a:pPr>
+            <a:r>
+              <a:t>• Trace one transaction</a:t>
+            </a:r>
+          </a:p>
+          <a:p>
+            <a:pPr>
+              <a:lnSpc>
+                <a:spcPts val="2200"/>
+              </a:lnSpc>
+              <a:spcAft>
+                <a:spcPts val="1000"/>
+              </a:spcAft>
+              <a:defRPr sz="2000" b="0">
+                <a:solidFill>
+                  <a:srgbClr val="333333"/>
+                </a:solidFill>
+                <a:latin typeface="Calibri"/>
+              </a:defRPr>
+            </a:pPr>
+            <a:r>
+              <a:t>• Change the sequence</a:t>
+            </a:r>
+          </a:p>
+          <a:p>
+            <a:pPr>
+              <a:lnSpc>
+                <a:spcPts val="2200"/>
+              </a:lnSpc>
+              <a:spcAft>
+                <a:spcPts val="1000"/>
+              </a:spcAft>
+              <a:defRPr sz="2000" b="0">
+                <a:solidFill>
+                  <a:srgbClr val="333333"/>
+                </a:solidFill>
+                <a:latin typeface="Calibri"/>
+              </a:defRPr>
+            </a:pPr>
+            <a:r>
+              <a:t>• Compare across protocols</a:t>
+            </a:r>
+          </a:p>
+        </p:txBody>
+      </p:sp>
+      <p:sp>
+        <p:nvSpPr>
+          <p:cNvPr id="4" name="TextBox 3"/>
+          <p:cNvSpPr txBox="1"/>
+          <p:nvPr/>
+        </p:nvSpPr>
+        <p:spPr>
+          <a:xfrm>
+            <a:off x="548640" y="6355080"/>
+            <a:ext cx="11064240" cy="320040"/>
+          </a:xfrm>
+          <a:prstGeom prst="rect">
+            <a:avLst/>
+          </a:prstGeom>
+          <a:noFill/>
+        </p:spPr>
+        <p:txBody>
+          <a:bodyPr wrap="square">
+            <a:noAutofit/>
+          </a:bodyPr>
+          <a:lstStyle/>
+          <a:p>
+            <a:pPr algn="r">
+              <a:lnSpc>
+                <a:spcPts val="2200"/>
+              </a:lnSpc>
+              <a:defRPr sz="1000" b="0">
+                <a:solidFill>
+                  <a:srgbClr val="666666"/>
+                </a:solidFill>
+                <a:latin typeface="Calibri"/>
+              </a:defRPr>
+            </a:pPr>
+            <a:r>
+              <a:t>learn_uart_spi_i2c / Module 8</a:t>
+            </a:r>
+          </a:p>
+        </p:txBody>
+      </p:sp>
+    </p:spTree>
+  </p:cSld>
+  <p:clrMapOvr>
+    <a:masterClrMapping/>
+  </p:clrMapOvr>
+</p:sld>
+</file>
+
+<file path=ppt/slides/slide29.xml><?xml version="1.0" encoding="utf-8"?>
+<p:sld xmlns:a="http://schemas.openxmlformats.org/drawingml/2006/main" xmlns:p="http://schemas.openxmlformats.org/presentationml/2006/main" xmlns:r="http://schemas.openxmlformats.org/officeDocument/2006/relationships">
+  <p:cSld>
+    <p:spTree>
+      <p:nvGrpSpPr>
+        <p:cNvPr id="1" name=""/>
+        <p:cNvGrpSpPr/>
+        <p:nvPr/>
+      </p:nvGrpSpPr>
+      <p:grpSpPr/>
+      <p:sp>
+        <p:nvSpPr>
+          <p:cNvPr id="2" name="TextBox 1"/>
+          <p:cNvSpPr txBox="1"/>
+          <p:nvPr/>
+        </p:nvSpPr>
+        <p:spPr>
+          <a:xfrm>
+            <a:off x="548640" y="411480"/>
+            <a:ext cx="11064240" cy="777240"/>
+          </a:xfrm>
+          <a:prstGeom prst="rect">
+            <a:avLst/>
+          </a:prstGeom>
+          <a:noFill/>
+        </p:spPr>
+        <p:txBody>
+          <a:bodyPr wrap="square">
+            <a:noAutofit/>
+          </a:bodyPr>
+          <a:lstStyle/>
+          <a:p>
+            <a:pPr>
+              <a:lnSpc>
+                <a:spcPts val="2200"/>
+              </a:lnSpc>
+              <a:defRPr sz="2800" b="1">
+                <a:solidFill>
+                  <a:srgbClr val="1A1A2E"/>
+                </a:solidFill>
+                <a:latin typeface="Calibri"/>
+              </a:defRPr>
+            </a:pPr>
+            <a:r>
+              <a:t>Assessment checklist</a:t>
+            </a:r>
+          </a:p>
+        </p:txBody>
+      </p:sp>
+      <p:sp>
+        <p:nvSpPr>
+          <p:cNvPr id="3" name="TextBox 2"/>
+          <p:cNvSpPr txBox="1"/>
+          <p:nvPr/>
+        </p:nvSpPr>
+        <p:spPr>
+          <a:xfrm>
+            <a:off x="548640" y="1234440"/>
+            <a:ext cx="11064240" cy="4937760"/>
+          </a:xfrm>
+          <a:prstGeom prst="rect">
+            <a:avLst/>
+          </a:prstGeom>
+          <a:noFill/>
+        </p:spPr>
+        <p:txBody>
+          <a:bodyPr wrap="square">
+            <a:noAutofit/>
+          </a:bodyPr>
+          <a:lstStyle/>
+          <a:p>
+            <a:pPr>
+              <a:lnSpc>
+                <a:spcPts val="2200"/>
+              </a:lnSpc>
+              <a:spcAft>
+                <a:spcPts val="1000"/>
+              </a:spcAft>
+              <a:defRPr sz="2000" b="0">
+                <a:solidFill>
+                  <a:srgbClr val="333333"/>
+                </a:solidFill>
+                <a:latin typeface="Calibri"/>
+              </a:defRPr>
+            </a:pPr>
+            <a:r>
+              <a:t>• Can describe the I²C UVM agent and how it maps to</a:t>
+            </a:r>
+          </a:p>
+          <a:p>
+            <a:pPr>
+              <a:lnSpc>
+                <a:spcPts val="2200"/>
+              </a:lnSpc>
+              <a:spcAft>
+                <a:spcPts val="1000"/>
+              </a:spcAft>
+              <a:defRPr sz="2000" b="0">
+                <a:solidFill>
+                  <a:srgbClr val="333333"/>
+                </a:solidFill>
+                <a:latin typeface="Calibri"/>
+              </a:defRPr>
+            </a:pPr>
+            <a:r>
+              <a:t>      I²C (addr+data, monitor on SCL/SDA).</a:t>
+            </a:r>
+          </a:p>
+          <a:p>
+            <a:pPr>
+              <a:lnSpc>
+                <a:spcPts val="2200"/>
+              </a:lnSpc>
+              <a:spcAft>
+                <a:spcPts val="1000"/>
+              </a:spcAft>
+              <a:defRPr sz="2000" b="0">
+                <a:solidFill>
+                  <a:srgbClr val="333333"/>
+                </a:solidFill>
+                <a:latin typeface="Calibri"/>
+              </a:defRPr>
+            </a:pPr>
+            <a:r>
+              <a:t>• Can run i2c_uvm and interpret UVM output.</a:t>
+            </a:r>
+          </a:p>
+          <a:p>
+            <a:pPr>
+              <a:lnSpc>
+                <a:spcPts val="2200"/>
+              </a:lnSpc>
+              <a:spcAft>
+                <a:spcPts val="1000"/>
+              </a:spcAft>
+              <a:defRPr sz="2000" b="0">
+                <a:solidFill>
+                  <a:srgbClr val="333333"/>
+                </a:solidFill>
+                <a:latin typeface="Calibri"/>
+              </a:defRPr>
+            </a:pPr>
+            <a:r>
+              <a:t>• Can compare UVM structure across UART, SPI, and I²C.</a:t>
+            </a:r>
+          </a:p>
+        </p:txBody>
+      </p:sp>
+      <p:sp>
+        <p:nvSpPr>
+          <p:cNvPr id="4" name="TextBox 3"/>
+          <p:cNvSpPr txBox="1"/>
+          <p:nvPr/>
+        </p:nvSpPr>
+        <p:spPr>
+          <a:xfrm>
+            <a:off x="548640" y="6355080"/>
+            <a:ext cx="11064240" cy="320040"/>
+          </a:xfrm>
+          <a:prstGeom prst="rect">
+            <a:avLst/>
+          </a:prstGeom>
+          <a:noFill/>
+        </p:spPr>
+        <p:txBody>
+          <a:bodyPr wrap="square">
+            <a:noAutofit/>
+          </a:bodyPr>
+          <a:lstStyle/>
+          <a:p>
+            <a:pPr algn="r">
+              <a:lnSpc>
+                <a:spcPts val="2200"/>
+              </a:lnSpc>
+              <a:defRPr sz="1000" b="0">
+                <a:solidFill>
+                  <a:srgbClr val="666666"/>
+                </a:solidFill>
+                <a:latin typeface="Calibri"/>
+              </a:defRPr>
+            </a:pPr>
+            <a:r>
+              <a:t>learn_uart_spi_i2c / Module 8</a:t>
+            </a:r>
+          </a:p>
+        </p:txBody>
+      </p:sp>
+    </p:spTree>
+  </p:cSld>
+  <p:clrMapOvr>
+    <a:masterClrMapping/>
+  </p:clrMapOvr>
+</p:sld>
+</file>
+
 <file path=ppt/slides/slide3.xml><?xml version="1.0" encoding="utf-8"?>
 <p:sld xmlns:a="http://schemas.openxmlformats.org/drawingml/2006/main" xmlns:p="http://schemas.openxmlformats.org/presentationml/2006/main" xmlns:r="http://schemas.openxmlformats.org/officeDocument/2006/relationships">
   <p:cSld>
@@ -5511,6 +8061,220 @@
             </a:pPr>
             <a:r>
               <a:t>      vendored UVM).</a:t>
+            </a:r>
+          </a:p>
+        </p:txBody>
+      </p:sp>
+      <p:sp>
+        <p:nvSpPr>
+          <p:cNvPr id="4" name="TextBox 3"/>
+          <p:cNvSpPr txBox="1"/>
+          <p:nvPr/>
+        </p:nvSpPr>
+        <p:spPr>
+          <a:xfrm>
+            <a:off x="548640" y="6355080"/>
+            <a:ext cx="11064240" cy="320040"/>
+          </a:xfrm>
+          <a:prstGeom prst="rect">
+            <a:avLst/>
+          </a:prstGeom>
+          <a:noFill/>
+        </p:spPr>
+        <p:txBody>
+          <a:bodyPr wrap="square">
+            <a:noAutofit/>
+          </a:bodyPr>
+          <a:lstStyle/>
+          <a:p>
+            <a:pPr algn="r">
+              <a:lnSpc>
+                <a:spcPts val="2200"/>
+              </a:lnSpc>
+              <a:defRPr sz="1000" b="0">
+                <a:solidFill>
+                  <a:srgbClr val="666666"/>
+                </a:solidFill>
+                <a:latin typeface="Calibri"/>
+              </a:defRPr>
+            </a:pPr>
+            <a:r>
+              <a:t>learn_uart_spi_i2c / Module 8</a:t>
+            </a:r>
+          </a:p>
+        </p:txBody>
+      </p:sp>
+    </p:spTree>
+  </p:cSld>
+  <p:clrMapOvr>
+    <a:masterClrMapping/>
+  </p:clrMapOvr>
+</p:sld>
+</file>
+
+<file path=ppt/slides/slide30.xml><?xml version="1.0" encoding="utf-8"?>
+<p:sld xmlns:a="http://schemas.openxmlformats.org/drawingml/2006/main" xmlns:p="http://schemas.openxmlformats.org/presentationml/2006/main" xmlns:r="http://schemas.openxmlformats.org/officeDocument/2006/relationships">
+  <p:cSld>
+    <p:spTree>
+      <p:nvGrpSpPr>
+        <p:cNvPr id="1" name=""/>
+        <p:cNvGrpSpPr/>
+        <p:nvPr/>
+      </p:nvGrpSpPr>
+      <p:grpSpPr/>
+      <p:sp>
+        <p:nvSpPr>
+          <p:cNvPr id="2" name="TextBox 1"/>
+          <p:cNvSpPr txBox="1"/>
+          <p:nvPr/>
+        </p:nvSpPr>
+        <p:spPr>
+          <a:xfrm>
+            <a:off x="548640" y="411480"/>
+            <a:ext cx="11064240" cy="777240"/>
+          </a:xfrm>
+          <a:prstGeom prst="rect">
+            <a:avLst/>
+          </a:prstGeom>
+          <a:noFill/>
+        </p:spPr>
+        <p:txBody>
+          <a:bodyPr wrap="square">
+            <a:noAutofit/>
+          </a:bodyPr>
+          <a:lstStyle/>
+          <a:p>
+            <a:pPr>
+              <a:lnSpc>
+                <a:spcPts val="2200"/>
+              </a:lnSpc>
+              <a:defRPr sz="2800" b="1">
+                <a:solidFill>
+                  <a:srgbClr val="1A1A2E"/>
+                </a:solidFill>
+                <a:latin typeface="Calibri"/>
+              </a:defRPr>
+            </a:pPr>
+            <a:r>
+              <a:t>Summary &amp; next steps</a:t>
+            </a:r>
+          </a:p>
+        </p:txBody>
+      </p:sp>
+      <p:sp>
+        <p:nvSpPr>
+          <p:cNvPr id="3" name="TextBox 2"/>
+          <p:cNvSpPr txBox="1"/>
+          <p:nvPr/>
+        </p:nvSpPr>
+        <p:spPr>
+          <a:xfrm>
+            <a:off x="548640" y="1234440"/>
+            <a:ext cx="11064240" cy="4937760"/>
+          </a:xfrm>
+          <a:prstGeom prst="rect">
+            <a:avLst/>
+          </a:prstGeom>
+          <a:noFill/>
+        </p:spPr>
+        <p:txBody>
+          <a:bodyPr wrap="square">
+            <a:noAutofit/>
+          </a:bodyPr>
+          <a:lstStyle/>
+          <a:p>
+            <a:pPr>
+              <a:lnSpc>
+                <a:spcPts val="2200"/>
+              </a:lnSpc>
+              <a:spcAft>
+                <a:spcPts val="1000"/>
+              </a:spcAft>
+              <a:defRPr sz="2000" b="0">
+                <a:solidFill>
+                  <a:srgbClr val="333333"/>
+                </a:solidFill>
+                <a:latin typeface="Calibri"/>
+              </a:defRPr>
+            </a:pPr>
+            <a:r>
+              <a:t>• Extend I²C verification to **UVM+SV** — I²C agent</a:t>
+            </a:r>
+          </a:p>
+          <a:p>
+            <a:pPr>
+              <a:lnSpc>
+                <a:spcPts val="2200"/>
+              </a:lnSpc>
+              <a:spcAft>
+                <a:spcPts val="1000"/>
+              </a:spcAft>
+              <a:defRPr sz="2000" b="0">
+                <a:solidFill>
+                  <a:srgbClr val="333333"/>
+                </a:solidFill>
+                <a:latin typeface="Calibri"/>
+              </a:defRPr>
+            </a:pPr>
+            <a:r>
+              <a:t>      (transaction, sequence, driver, monitor, scoreboa…</a:t>
+            </a:r>
+          </a:p>
+          <a:p>
+            <a:pPr>
+              <a:lnSpc>
+                <a:spcPts val="2200"/>
+              </a:lnSpc>
+              <a:spcAft>
+                <a:spcPts val="1000"/>
+              </a:spcAft>
+              <a:defRPr sz="2000" b="0">
+                <a:solidFill>
+                  <a:srgbClr val="333333"/>
+                </a:solidFill>
+                <a:latin typeface="Calibri"/>
+              </a:defRPr>
+            </a:pPr>
+            <a:r>
+              <a:t>• Complete module8/CHECKLIST.md</a:t>
+            </a:r>
+          </a:p>
+          <a:p>
+            <a:pPr>
+              <a:lnSpc>
+                <a:spcPts val="2200"/>
+              </a:lnSpc>
+              <a:spcAft>
+                <a:spcPts val="1000"/>
+              </a:spcAft>
+              <a:defRPr sz="2000" b="0">
+                <a:solidFill>
+                  <a:srgbClr val="333333"/>
+                </a:solidFill>
+                <a:latin typeface="Calibri"/>
+              </a:defRPr>
+            </a:pPr>
+            <a:r>
+              <a:t>• Review module8/EXAMPLES.md and run each lab</a:t>
+            </a:r>
+          </a:p>
+          <a:p>
+            <a:pPr>
+              <a:lnSpc>
+                <a:spcPts val="2200"/>
+              </a:lnSpc>
+              <a:spcAft>
+                <a:spcPts val="1000"/>
+              </a:spcAft>
+              <a:defRPr sz="2000" b="0">
+                <a:solidFill>
+                  <a:srgbClr val="333333"/>
+                </a:solidFill>
+                <a:latin typeface="Calibri"/>
+              </a:defRPr>
+            </a:pPr>
+            <a:r>
+              <a:t>• Next: Next module in course</a:t>
             </a:r>
           </a:p>
         </p:txBody>
@@ -5922,7 +8686,7 @@
               </a:defRPr>
             </a:pPr>
             <a:r>
-              <a:t>Syllabus topics</a:t>
+              <a:t>How to learn this module</a:t>
             </a:r>
           </a:p>
         </p:txBody>
@@ -6018,7 +8782,7 @@
               </a:defRPr>
             </a:pPr>
             <a:r>
-              <a:t>1. I²C UVM Agent</a:t>
+              <a:t>Suggested learning path</a:t>
             </a:r>
           </a:p>
         </p:txBody>
@@ -6060,7 +8824,7 @@
               </a:defRPr>
             </a:pPr>
             <a:r>
-              <a:t>• Transaction (I2cTransaction): address and data to</a:t>
+              <a:t>• Read the detailed I²C learning guide:</a:t>
             </a:r>
           </a:p>
           <a:p>
@@ -6079,7 +8843,7 @@
               </a:defRPr>
             </a:pPr>
             <a:r>
-              <a:t>      write; monitor fills observed_addr/observed_data.</a:t>
+              <a:t>      I2C_LEARNING_GUIDE.md — what I²C is, how it works</a:t>
             </a:r>
           </a:p>
           <a:p>
@@ -6098,7 +8862,7 @@
               </a:defRPr>
             </a:pPr>
             <a:r>
-              <a:t>• Sequence (I2cSequence): produces directed</a:t>
+              <a:t>      (START/STOP…</a:t>
             </a:r>
           </a:p>
           <a:p>
@@ -6117,7 +8881,7 @@
               </a:defRPr>
             </a:pPr>
             <a:r>
-              <a:t>      transactions (e.g. same addr, different data bytes).</a:t>
+              <a:t>• Read the protocols + UVM overview:</a:t>
             </a:r>
           </a:p>
           <a:p>
@@ -6136,7 +8900,7 @@
               </a:defRPr>
             </a:pPr>
             <a:r>
-              <a:t>• Driver (I2cDriver): gets transaction, drives</a:t>
+              <a:t>      LEARNING_GUIDE_PROTOCOLS_AND_UVM.md — Part B § 5.</a:t>
             </a:r>
           </a:p>
           <a:p>
@@ -6155,83 +8919,7 @@
               </a:defRPr>
             </a:pPr>
             <a:r>
-              <a:t>      start/addr/data_in for one cycle, waits for done.</a:t>
-            </a:r>
-          </a:p>
-          <a:p>
-            <a:pPr>
-              <a:lnSpc>
-                <a:spcPts val="2200"/>
-              </a:lnSpc>
-              <a:spcAft>
-                <a:spcPts val="1000"/>
-              </a:spcAft>
-              <a:defRPr sz="2000" b="0">
-                <a:solidFill>
-                  <a:srgbClr val="333333"/>
-                </a:solidFill>
-                <a:latin typeface="Calibri"/>
-              </a:defRPr>
-            </a:pPr>
-            <a:r>
-              <a:t>• Monitor (I2cMonitor): watches SCL/SDA; after START,</a:t>
-            </a:r>
-          </a:p>
-          <a:p>
-            <a:pPr>
-              <a:lnSpc>
-                <a:spcPts val="2200"/>
-              </a:lnSpc>
-              <a:spcAft>
-                <a:spcPts val="1000"/>
-              </a:spcAft>
-              <a:defRPr sz="2000" b="0">
-                <a:solidFill>
-                  <a:srgbClr val="333333"/>
-                </a:solidFill>
-                <a:latin typeface="Calibri"/>
-              </a:defRPr>
-            </a:pPr>
-            <a:r>
-              <a:t>      samples SDA on rising SCL to reconstruct 8 bits…</a:t>
-            </a:r>
-          </a:p>
-          <a:p>
-            <a:pPr>
-              <a:lnSpc>
-                <a:spcPts val="2200"/>
-              </a:lnSpc>
-              <a:spcAft>
-                <a:spcPts val="1000"/>
-              </a:spcAft>
-              <a:defRPr sz="2000" b="0">
-                <a:solidFill>
-                  <a:srgbClr val="333333"/>
-                </a:solidFill>
-                <a:latin typeface="Calibri"/>
-              </a:defRPr>
-            </a:pPr>
-            <a:r>
-              <a:t>• Scoreboard (I2cScoreboard): compares expected (from</a:t>
-            </a:r>
-          </a:p>
-          <a:p>
-            <a:pPr>
-              <a:lnSpc>
-                <a:spcPts val="2200"/>
-              </a:lnSpc>
-              <a:spcAft>
-                <a:spcPts val="1000"/>
-              </a:spcAft>
-              <a:defRPr sz="2000" b="0">
-                <a:solidFill>
-                  <a:srgbClr val="333333"/>
-                </a:solidFill>
-                <a:latin typeface="Calibri"/>
-              </a:defRPr>
-            </a:pPr>
-            <a:r>
-              <a:t>      test) vs observed_addr/observed_data.</a:t>
+              <a:t>      How UVM Maps t…</a:t>
             </a:r>
           </a:p>
         </p:txBody>
@@ -6301,8 +8989,8 @@
         </p:nvSpPr>
         <p:spPr>
           <a:xfrm>
-            <a:off x="548640" y="411480"/>
-            <a:ext cx="11064240" cy="777240"/>
+            <a:off x="548640" y="2743200"/>
+            <a:ext cx="11064240" cy="1371600"/>
           </a:xfrm>
           <a:prstGeom prst="rect">
             <a:avLst/>
@@ -6315,11 +9003,11 @@
           </a:bodyPr>
           <a:lstStyle/>
           <a:p>
-            <a:pPr>
-              <a:lnSpc>
-                <a:spcPts val="2200"/>
-              </a:lnSpc>
-              <a:defRPr sz="2800" b="1">
+            <a:pPr algn="ctr">
+              <a:lnSpc>
+                <a:spcPts val="2200"/>
+              </a:lnSpc>
+              <a:defRPr sz="3600" b="1">
                 <a:solidFill>
                   <a:srgbClr val="1A1A2E"/>
                 </a:solidFill>
@@ -6327,7 +9015,7 @@
               </a:defRPr>
             </a:pPr>
             <a:r>
-              <a:t>2. Toolchain</a:t>
+              <a:t>Design architecture</a:t>
             </a:r>
           </a:p>
         </p:txBody>
@@ -6335,67 +9023,6 @@
       <p:sp>
         <p:nvSpPr>
           <p:cNvPr id="3" name="TextBox 2"/>
-          <p:cNvSpPr txBox="1"/>
-          <p:nvPr/>
-        </p:nvSpPr>
-        <p:spPr>
-          <a:xfrm>
-            <a:off x="548640" y="1234440"/>
-            <a:ext cx="11064240" cy="4937760"/>
-          </a:xfrm>
-          <a:prstGeom prst="rect">
-            <a:avLst/>
-          </a:prstGeom>
-          <a:noFill/>
-        </p:spPr>
-        <p:txBody>
-          <a:bodyPr wrap="square">
-            <a:noAutofit/>
-          </a:bodyPr>
-          <a:lstStyle/>
-          <a:p>
-            <a:pPr>
-              <a:lnSpc>
-                <a:spcPts val="2200"/>
-              </a:lnSpc>
-              <a:spcAft>
-                <a:spcPts val="1000"/>
-              </a:spcAft>
-              <a:defRPr sz="2000" b="0">
-                <a:solidFill>
-                  <a:srgbClr val="333333"/>
-                </a:solidFill>
-                <a:latin typeface="Calibri"/>
-              </a:defRPr>
-            </a:pPr>
-            <a:r>
-              <a:t>• Same as Module 6 (SPI UVM): Verilator with -sv,</a:t>
-            </a:r>
-          </a:p>
-          <a:p>
-            <a:pPr>
-              <a:lnSpc>
-                <a:spcPts val="2200"/>
-              </a:lnSpc>
-              <a:spcAft>
-                <a:spcPts val="1000"/>
-              </a:spcAft>
-              <a:defRPr sz="2000" b="0">
-                <a:solidFill>
-                  <a:srgbClr val="333333"/>
-                </a:solidFill>
-                <a:latin typeface="Calibri"/>
-              </a:defRPr>
-            </a:pPr>
-            <a:r>
-              <a:t>      --timing, --trace, UVM include paths, `make SIM=ver…</a:t>
-            </a:r>
-          </a:p>
-        </p:txBody>
-      </p:sp>
-      <p:sp>
-        <p:nvSpPr>
-          <p:cNvPr id="4" name="TextBox 3"/>
           <p:cNvSpPr txBox="1"/>
           <p:nvPr/>
         </p:nvSpPr>
@@ -6458,8 +9085,8 @@
         </p:nvSpPr>
         <p:spPr>
           <a:xfrm>
-            <a:off x="548640" y="2743200"/>
-            <a:ext cx="11064240" cy="1371600"/>
+            <a:off x="548640" y="411480"/>
+            <a:ext cx="11064240" cy="777240"/>
           </a:xfrm>
           <a:prstGeom prst="rect">
             <a:avLst/>
@@ -6472,11 +9099,11 @@
           </a:bodyPr>
           <a:lstStyle/>
           <a:p>
-            <a:pPr algn="ctr">
-              <a:lnSpc>
-                <a:spcPts val="2200"/>
-              </a:lnSpc>
-              <a:defRPr sz="3600" b="1">
+            <a:pPr>
+              <a:lnSpc>
+                <a:spcPts val="2200"/>
+              </a:lnSpc>
+              <a:defRPr sz="2800" b="1">
                 <a:solidFill>
                   <a:srgbClr val="1A1A2E"/>
                 </a:solidFill>
@@ -6484,14 +9111,77 @@
               </a:defRPr>
             </a:pPr>
             <a:r>
-              <a:t>Hands-on examples</a:t>
-            </a:r>
-          </a:p>
-        </p:txBody>
-      </p:sp>
-      <p:sp>
-        <p:nvSpPr>
-          <p:cNvPr id="3" name="TextBox 2"/>
+              <a:t>RTL / block architecture</a:t>
+            </a:r>
+          </a:p>
+        </p:txBody>
+      </p:sp>
+      <p:pic>
+        <p:nvPicPr>
+          <p:cNvPr id="3" name="Picture 2" descr="rtl_architecture.png"/>
+          <p:cNvPicPr>
+            <a:picLocks noChangeAspect="1"/>
+          </p:cNvPicPr>
+          <p:nvPr/>
+        </p:nvPicPr>
+        <p:blipFill>
+          <a:blip r:embed="rId2"/>
+          <a:stretch>
+            <a:fillRect/>
+          </a:stretch>
+        </p:blipFill>
+        <p:spPr>
+          <a:xfrm>
+            <a:off x="548640" y="1143000"/>
+            <a:ext cx="8128000" cy="4572000"/>
+          </a:xfrm>
+          <a:prstGeom prst="rect">
+            <a:avLst/>
+          </a:prstGeom>
+        </p:spPr>
+      </p:pic>
+      <p:sp>
+        <p:nvSpPr>
+          <p:cNvPr id="4" name="TextBox 3"/>
+          <p:cNvSpPr txBox="1"/>
+          <p:nvPr/>
+        </p:nvSpPr>
+        <p:spPr>
+          <a:xfrm>
+            <a:off x="548640" y="5897880"/>
+            <a:ext cx="11064240" cy="411480"/>
+          </a:xfrm>
+          <a:prstGeom prst="rect">
+            <a:avLst/>
+          </a:prstGeom>
+          <a:noFill/>
+        </p:spPr>
+        <p:txBody>
+          <a:bodyPr wrap="square">
+            <a:noAutofit/>
+          </a:bodyPr>
+          <a:lstStyle/>
+          <a:p>
+            <a:pPr>
+              <a:lnSpc>
+                <a:spcPts val="2200"/>
+              </a:lnSpc>
+              <a:defRPr sz="1200" b="0">
+                <a:solidFill>
+                  <a:srgbClr val="333333"/>
+                </a:solidFill>
+                <a:latin typeface="Calibri"/>
+              </a:defRPr>
+            </a:pPr>
+            <a:r>
+              <a:t>Module 8: DUT / block hierarchy (see module8/examples/).</a:t>
+            </a:r>
+          </a:p>
+        </p:txBody>
+      </p:sp>
+      <p:sp>
+        <p:nvSpPr>
+          <p:cNvPr id="5" name="TextBox 4"/>
           <p:cNvSpPr txBox="1"/>
           <p:nvPr/>
         </p:nvSpPr>
